--- a/assets/files/Profil-Perusahaan-5-Slide.pptx
+++ b/assets/files/Profil-Perusahaan-5-Slide.pptx
@@ -2,7 +2,7 @@
 <file path=ppt/presentation.xml><?xml version="1.0" encoding="utf-8"?>
 <p:presentation xmlns:a="http://schemas.openxmlformats.org/drawingml/2006/main" xmlns:r="http://schemas.openxmlformats.org/officeDocument/2006/relationships" xmlns:p="http://schemas.openxmlformats.org/presentationml/2006/main" saveSubsetFonts="1">
   <p:sldMasterIdLst>
-    <p:sldMasterId id="2147483648" r:id="rId1"/>
+    <p:sldMasterId id="2147483660" r:id="rId1"/>
   </p:sldMasterIdLst>
   <p:sldIdLst>
     <p:sldId id="256" r:id="rId2"/>
@@ -108,22 +108,27 @@
       </a:defRPr>
     </a:lvl9pPr>
   </p:defaultTextStyle>
+  <p:extLst>
+    <p:ext uri="{EFAFB233-063F-42B5-8137-9DF3F51BA10A}">
+      <p15:sldGuideLst xmlns:p15="http://schemas.microsoft.com/office/powerpoint/2012/main"/>
+    </p:ext>
+  </p:extLst>
 </p:presentation>
 </file>
 
 <file path=ppt/diagrams/colors1.xml><?xml version="1.0" encoding="utf-8"?>
-<dgm:colorsDef xmlns:dgm="http://schemas.openxmlformats.org/drawingml/2006/diagram" xmlns:a="http://schemas.openxmlformats.org/drawingml/2006/main" uniqueId="urn:microsoft.com/office/officeart/2005/8/colors/accent1_2">
+<dgm:colorsDef xmlns:dgm="http://schemas.openxmlformats.org/drawingml/2006/diagram" xmlns:a="http://schemas.openxmlformats.org/drawingml/2006/main" uniqueId="urn:microsoft.com/office/officeart/2005/8/colors/accent0_3">
   <dgm:title val=""/>
   <dgm:desc val=""/>
   <dgm:catLst>
-    <dgm:cat type="accent1" pri="11200"/>
+    <dgm:cat type="mainScheme" pri="10300"/>
   </dgm:catLst>
   <dgm:styleLbl name="node0">
     <dgm:fillClrLst meth="repeat">
-      <a:schemeClr val="accent1"/>
+      <a:schemeClr val="dk2"/>
     </dgm:fillClrLst>
     <dgm:linClrLst meth="repeat">
-      <a:schemeClr val="lt1"/>
+      <a:schemeClr val="lt2"/>
     </dgm:linClrLst>
     <dgm:effectClrLst/>
     <dgm:txLinClrLst/>
@@ -132,10 +137,10 @@
   </dgm:styleLbl>
   <dgm:styleLbl name="alignNode1">
     <dgm:fillClrLst meth="repeat">
-      <a:schemeClr val="accent1"/>
+      <a:schemeClr val="dk2"/>
     </dgm:fillClrLst>
     <dgm:linClrLst meth="repeat">
-      <a:schemeClr val="accent1"/>
+      <a:schemeClr val="dk2"/>
     </dgm:linClrLst>
     <dgm:effectClrLst/>
     <dgm:txLinClrLst/>
@@ -144,10 +149,10 @@
   </dgm:styleLbl>
   <dgm:styleLbl name="node1">
     <dgm:fillClrLst meth="repeat">
-      <a:schemeClr val="accent1"/>
+      <a:schemeClr val="dk2"/>
     </dgm:fillClrLst>
     <dgm:linClrLst meth="repeat">
-      <a:schemeClr val="lt1"/>
+      <a:schemeClr val="lt2"/>
     </dgm:linClrLst>
     <dgm:effectClrLst/>
     <dgm:txLinClrLst/>
@@ -156,10 +161,10 @@
   </dgm:styleLbl>
   <dgm:styleLbl name="lnNode1">
     <dgm:fillClrLst meth="repeat">
-      <a:schemeClr val="accent1"/>
+      <a:schemeClr val="dk2"/>
     </dgm:fillClrLst>
     <dgm:linClrLst meth="repeat">
-      <a:schemeClr val="lt1"/>
+      <a:schemeClr val="lt2"/>
     </dgm:linClrLst>
     <dgm:effectClrLst/>
     <dgm:txLinClrLst/>
@@ -168,12 +173,12 @@
   </dgm:styleLbl>
   <dgm:styleLbl name="vennNode1">
     <dgm:fillClrLst meth="repeat">
-      <a:schemeClr val="accent1">
+      <a:schemeClr val="dk2">
         <a:alpha val="50000"/>
       </a:schemeClr>
     </dgm:fillClrLst>
     <dgm:linClrLst meth="repeat">
-      <a:schemeClr val="lt1"/>
+      <a:schemeClr val="lt2"/>
     </dgm:linClrLst>
     <dgm:effectClrLst/>
     <dgm:txLinClrLst/>
@@ -182,10 +187,10 @@
   </dgm:styleLbl>
   <dgm:styleLbl name="node2">
     <dgm:fillClrLst meth="repeat">
-      <a:schemeClr val="accent1"/>
+      <a:schemeClr val="dk2"/>
     </dgm:fillClrLst>
     <dgm:linClrLst meth="repeat">
-      <a:schemeClr val="lt1"/>
+      <a:schemeClr val="lt2"/>
     </dgm:linClrLst>
     <dgm:effectClrLst/>
     <dgm:txLinClrLst/>
@@ -194,10 +199,10 @@
   </dgm:styleLbl>
   <dgm:styleLbl name="node3">
     <dgm:fillClrLst meth="repeat">
-      <a:schemeClr val="accent1"/>
+      <a:schemeClr val="dk2"/>
     </dgm:fillClrLst>
     <dgm:linClrLst meth="repeat">
-      <a:schemeClr val="lt1"/>
+      <a:schemeClr val="lt2"/>
     </dgm:linClrLst>
     <dgm:effectClrLst/>
     <dgm:txLinClrLst/>
@@ -206,10 +211,10 @@
   </dgm:styleLbl>
   <dgm:styleLbl name="node4">
     <dgm:fillClrLst meth="repeat">
-      <a:schemeClr val="accent1"/>
+      <a:schemeClr val="dk2"/>
     </dgm:fillClrLst>
     <dgm:linClrLst meth="repeat">
-      <a:schemeClr val="lt1"/>
+      <a:schemeClr val="lt2"/>
     </dgm:linClrLst>
     <dgm:effectClrLst/>
     <dgm:txLinClrLst/>
@@ -218,60 +223,64 @@
   </dgm:styleLbl>
   <dgm:styleLbl name="fgImgPlace1">
     <dgm:fillClrLst meth="repeat">
-      <a:schemeClr val="accent1">
+      <a:schemeClr val="dk2">
         <a:tint val="50000"/>
       </a:schemeClr>
     </dgm:fillClrLst>
     <dgm:linClrLst meth="repeat">
-      <a:schemeClr val="lt1"/>
+      <a:schemeClr val="lt2"/>
     </dgm:linClrLst>
     <dgm:effectClrLst/>
     <dgm:txLinClrLst/>
     <dgm:txFillClrLst meth="repeat">
-      <a:schemeClr val="lt1"/>
+      <a:schemeClr val="lt2"/>
     </dgm:txFillClrLst>
     <dgm:txEffectClrLst/>
   </dgm:styleLbl>
   <dgm:styleLbl name="alignImgPlace1">
     <dgm:fillClrLst meth="repeat">
-      <a:schemeClr val="accent1">
+      <a:schemeClr val="dk2">
         <a:tint val="50000"/>
       </a:schemeClr>
     </dgm:fillClrLst>
     <dgm:linClrLst meth="repeat">
-      <a:schemeClr val="lt1"/>
+      <a:schemeClr val="dk2">
+        <a:shade val="80000"/>
+      </a:schemeClr>
     </dgm:linClrLst>
     <dgm:effectClrLst/>
     <dgm:txLinClrLst/>
     <dgm:txFillClrLst meth="repeat">
-      <a:schemeClr val="lt1"/>
+      <a:schemeClr val="lt2"/>
     </dgm:txFillClrLst>
     <dgm:txEffectClrLst/>
   </dgm:styleLbl>
   <dgm:styleLbl name="bgImgPlace1">
     <dgm:fillClrLst meth="repeat">
-      <a:schemeClr val="accent1">
+      <a:schemeClr val="dk2">
         <a:tint val="50000"/>
       </a:schemeClr>
     </dgm:fillClrLst>
     <dgm:linClrLst meth="repeat">
-      <a:schemeClr val="lt1"/>
+      <a:schemeClr val="dk2">
+        <a:shade val="80000"/>
+      </a:schemeClr>
     </dgm:linClrLst>
     <dgm:effectClrLst/>
     <dgm:txLinClrLst/>
     <dgm:txFillClrLst meth="repeat">
-      <a:schemeClr val="lt1"/>
+      <a:schemeClr val="lt2"/>
     </dgm:txFillClrLst>
     <dgm:txEffectClrLst/>
   </dgm:styleLbl>
   <dgm:styleLbl name="sibTrans2D1">
     <dgm:fillClrLst meth="repeat">
-      <a:schemeClr val="accent1">
+      <a:schemeClr val="dk2">
         <a:tint val="60000"/>
       </a:schemeClr>
     </dgm:fillClrLst>
     <dgm:linClrLst meth="repeat">
-      <a:schemeClr val="accent1">
+      <a:schemeClr val="dk2">
         <a:tint val="60000"/>
       </a:schemeClr>
     </dgm:linClrLst>
@@ -282,12 +291,12 @@
   </dgm:styleLbl>
   <dgm:styleLbl name="fgSibTrans2D1">
     <dgm:fillClrLst meth="repeat">
-      <a:schemeClr val="accent1">
+      <a:schemeClr val="dk2">
         <a:tint val="60000"/>
       </a:schemeClr>
     </dgm:fillClrLst>
     <dgm:linClrLst meth="repeat">
-      <a:schemeClr val="accent1">
+      <a:schemeClr val="dk2">
         <a:tint val="60000"/>
       </a:schemeClr>
     </dgm:linClrLst>
@@ -298,12 +307,12 @@
   </dgm:styleLbl>
   <dgm:styleLbl name="bgSibTrans2D1">
     <dgm:fillClrLst meth="repeat">
-      <a:schemeClr val="accent1">
+      <a:schemeClr val="dk2">
         <a:tint val="60000"/>
       </a:schemeClr>
     </dgm:fillClrLst>
     <dgm:linClrLst meth="repeat">
-      <a:schemeClr val="accent1">
+      <a:schemeClr val="dk2">
         <a:tint val="60000"/>
       </a:schemeClr>
     </dgm:linClrLst>
@@ -314,40 +323,40 @@
   </dgm:styleLbl>
   <dgm:styleLbl name="sibTrans1D1">
     <dgm:fillClrLst meth="repeat">
-      <a:schemeClr val="accent1"/>
+      <a:schemeClr val="dk2"/>
     </dgm:fillClrLst>
     <dgm:linClrLst meth="repeat">
-      <a:schemeClr val="accent1"/>
+      <a:schemeClr val="dk2"/>
     </dgm:linClrLst>
     <dgm:effectClrLst/>
     <dgm:txLinClrLst/>
     <dgm:txFillClrLst meth="repeat">
-      <a:schemeClr val="tx1"/>
+      <a:schemeClr val="lt2"/>
     </dgm:txFillClrLst>
     <dgm:txEffectClrLst/>
   </dgm:styleLbl>
   <dgm:styleLbl name="callout">
     <dgm:fillClrLst meth="repeat">
-      <a:schemeClr val="accent1"/>
+      <a:schemeClr val="dk2"/>
     </dgm:fillClrLst>
     <dgm:linClrLst meth="repeat">
-      <a:schemeClr val="accent1">
+      <a:schemeClr val="dk2">
         <a:tint val="50000"/>
       </a:schemeClr>
     </dgm:linClrLst>
     <dgm:effectClrLst/>
     <dgm:txLinClrLst/>
     <dgm:txFillClrLst meth="repeat">
-      <a:schemeClr val="tx1"/>
+      <a:schemeClr val="lt2"/>
     </dgm:txFillClrLst>
     <dgm:txEffectClrLst/>
   </dgm:styleLbl>
   <dgm:styleLbl name="asst0">
     <dgm:fillClrLst meth="repeat">
-      <a:schemeClr val="accent1"/>
+      <a:schemeClr val="dk2"/>
     </dgm:fillClrLst>
     <dgm:linClrLst meth="repeat">
-      <a:schemeClr val="lt1"/>
+      <a:schemeClr val="lt2"/>
     </dgm:linClrLst>
     <dgm:effectClrLst/>
     <dgm:txLinClrLst/>
@@ -356,10 +365,10 @@
   </dgm:styleLbl>
   <dgm:styleLbl name="asst1">
     <dgm:fillClrLst meth="repeat">
-      <a:schemeClr val="accent1"/>
+      <a:schemeClr val="dk2"/>
     </dgm:fillClrLst>
     <dgm:linClrLst meth="repeat">
-      <a:schemeClr val="lt1"/>
+      <a:schemeClr val="lt2"/>
     </dgm:linClrLst>
     <dgm:effectClrLst/>
     <dgm:txLinClrLst/>
@@ -368,10 +377,10 @@
   </dgm:styleLbl>
   <dgm:styleLbl name="asst2">
     <dgm:fillClrLst meth="repeat">
-      <a:schemeClr val="accent1"/>
+      <a:schemeClr val="dk2"/>
     </dgm:fillClrLst>
     <dgm:linClrLst meth="repeat">
-      <a:schemeClr val="lt1"/>
+      <a:schemeClr val="lt2"/>
     </dgm:linClrLst>
     <dgm:effectClrLst/>
     <dgm:txLinClrLst/>
@@ -380,10 +389,10 @@
   </dgm:styleLbl>
   <dgm:styleLbl name="asst3">
     <dgm:fillClrLst meth="repeat">
-      <a:schemeClr val="accent1"/>
+      <a:schemeClr val="dk2"/>
     </dgm:fillClrLst>
     <dgm:linClrLst meth="repeat">
-      <a:schemeClr val="lt1"/>
+      <a:schemeClr val="lt2"/>
     </dgm:linClrLst>
     <dgm:effectClrLst/>
     <dgm:txLinClrLst/>
@@ -392,10 +401,10 @@
   </dgm:styleLbl>
   <dgm:styleLbl name="asst4">
     <dgm:fillClrLst meth="repeat">
-      <a:schemeClr val="accent1"/>
+      <a:schemeClr val="dk2"/>
     </dgm:fillClrLst>
     <dgm:linClrLst meth="repeat">
-      <a:schemeClr val="lt1"/>
+      <a:schemeClr val="lt2"/>
     </dgm:linClrLst>
     <dgm:effectClrLst/>
     <dgm:txLinClrLst/>
@@ -404,70 +413,70 @@
   </dgm:styleLbl>
   <dgm:styleLbl name="parChTrans2D1">
     <dgm:fillClrLst meth="repeat">
-      <a:schemeClr val="accent1">
+      <a:schemeClr val="dk2">
         <a:tint val="60000"/>
       </a:schemeClr>
     </dgm:fillClrLst>
     <dgm:linClrLst meth="repeat">
-      <a:schemeClr val="accent1">
+      <a:schemeClr val="dk2">
         <a:tint val="60000"/>
       </a:schemeClr>
     </dgm:linClrLst>
     <dgm:effectClrLst/>
     <dgm:txLinClrLst/>
     <dgm:txFillClrLst meth="repeat">
-      <a:schemeClr val="lt1"/>
+      <a:schemeClr val="lt2"/>
     </dgm:txFillClrLst>
     <dgm:txEffectClrLst/>
   </dgm:styleLbl>
   <dgm:styleLbl name="parChTrans2D2">
     <dgm:fillClrLst meth="repeat">
-      <a:schemeClr val="accent1"/>
+      <a:schemeClr val="dk2"/>
     </dgm:fillClrLst>
     <dgm:linClrLst meth="repeat">
-      <a:schemeClr val="accent1"/>
+      <a:schemeClr val="dk2"/>
     </dgm:linClrLst>
     <dgm:effectClrLst/>
     <dgm:txLinClrLst/>
     <dgm:txFillClrLst meth="repeat">
-      <a:schemeClr val="lt1"/>
+      <a:schemeClr val="lt2"/>
     </dgm:txFillClrLst>
     <dgm:txEffectClrLst/>
   </dgm:styleLbl>
   <dgm:styleLbl name="parChTrans2D3">
     <dgm:fillClrLst meth="repeat">
-      <a:schemeClr val="accent1"/>
+      <a:schemeClr val="dk2"/>
     </dgm:fillClrLst>
     <dgm:linClrLst meth="repeat">
-      <a:schemeClr val="accent1"/>
+      <a:schemeClr val="dk2"/>
     </dgm:linClrLst>
     <dgm:effectClrLst/>
     <dgm:txLinClrLst/>
     <dgm:txFillClrLst meth="repeat">
-      <a:schemeClr val="lt1"/>
+      <a:schemeClr val="lt2"/>
     </dgm:txFillClrLst>
     <dgm:txEffectClrLst/>
   </dgm:styleLbl>
   <dgm:styleLbl name="parChTrans2D4">
     <dgm:fillClrLst meth="repeat">
-      <a:schemeClr val="accent1"/>
+      <a:schemeClr val="dk2"/>
     </dgm:fillClrLst>
     <dgm:linClrLst meth="repeat">
-      <a:schemeClr val="accent1"/>
+      <a:schemeClr val="dk2"/>
     </dgm:linClrLst>
     <dgm:effectClrLst/>
     <dgm:txLinClrLst/>
     <dgm:txFillClrLst meth="repeat">
-      <a:schemeClr val="lt1"/>
+      <a:schemeClr val="lt2"/>
     </dgm:txFillClrLst>
     <dgm:txEffectClrLst/>
   </dgm:styleLbl>
   <dgm:styleLbl name="parChTrans1D1">
     <dgm:fillClrLst meth="repeat">
-      <a:schemeClr val="accent1"/>
+      <a:schemeClr val="dk2"/>
     </dgm:fillClrLst>
     <dgm:linClrLst meth="repeat">
-      <a:schemeClr val="accent1">
+      <a:schemeClr val="dk2">
         <a:shade val="60000"/>
       </a:schemeClr>
     </dgm:linClrLst>
@@ -480,10 +489,10 @@
   </dgm:styleLbl>
   <dgm:styleLbl name="parChTrans1D2">
     <dgm:fillClrLst meth="repeat">
-      <a:schemeClr val="accent1"/>
+      <a:schemeClr val="dk2"/>
     </dgm:fillClrLst>
     <dgm:linClrLst meth="repeat">
-      <a:schemeClr val="accent1">
+      <a:schemeClr val="dk2">
         <a:shade val="60000"/>
       </a:schemeClr>
     </dgm:linClrLst>
@@ -496,10 +505,10 @@
   </dgm:styleLbl>
   <dgm:styleLbl name="parChTrans1D3">
     <dgm:fillClrLst meth="repeat">
-      <a:schemeClr val="accent1"/>
+      <a:schemeClr val="dk2"/>
     </dgm:fillClrLst>
     <dgm:linClrLst meth="repeat">
-      <a:schemeClr val="accent1">
+      <a:schemeClr val="dk2">
         <a:shade val="80000"/>
       </a:schemeClr>
     </dgm:linClrLst>
@@ -512,10 +521,10 @@
   </dgm:styleLbl>
   <dgm:styleLbl name="parChTrans1D4">
     <dgm:fillClrLst meth="repeat">
-      <a:schemeClr val="accent1"/>
+      <a:schemeClr val="dk2"/>
     </dgm:fillClrLst>
     <dgm:linClrLst meth="repeat">
-      <a:schemeClr val="accent1">
+      <a:schemeClr val="dk2">
         <a:shade val="80000"/>
       </a:schemeClr>
     </dgm:linClrLst>
@@ -528,12 +537,12 @@
   </dgm:styleLbl>
   <dgm:styleLbl name="fgAcc1">
     <dgm:fillClrLst meth="repeat">
-      <a:schemeClr val="lt1">
+      <a:schemeClr val="lt2">
         <a:alpha val="90000"/>
       </a:schemeClr>
     </dgm:fillClrLst>
     <dgm:linClrLst meth="repeat">
-      <a:schemeClr val="accent1"/>
+      <a:schemeClr val="dk2"/>
     </dgm:linClrLst>
     <dgm:effectClrLst/>
     <dgm:txLinClrLst/>
@@ -544,12 +553,12 @@
   </dgm:styleLbl>
   <dgm:styleLbl name="conFgAcc1">
     <dgm:fillClrLst meth="repeat">
-      <a:schemeClr val="lt1">
+      <a:schemeClr val="lt2">
         <a:alpha val="90000"/>
       </a:schemeClr>
     </dgm:fillClrLst>
     <dgm:linClrLst meth="repeat">
-      <a:schemeClr val="accent1"/>
+      <a:schemeClr val="dk2"/>
     </dgm:linClrLst>
     <dgm:effectClrLst/>
     <dgm:txLinClrLst/>
@@ -560,12 +569,12 @@
   </dgm:styleLbl>
   <dgm:styleLbl name="alignAcc1">
     <dgm:fillClrLst meth="repeat">
-      <a:schemeClr val="lt1">
+      <a:schemeClr val="lt2">
         <a:alpha val="90000"/>
       </a:schemeClr>
     </dgm:fillClrLst>
     <dgm:linClrLst meth="repeat">
-      <a:schemeClr val="accent1"/>
+      <a:schemeClr val="dk2"/>
     </dgm:linClrLst>
     <dgm:effectClrLst/>
     <dgm:txLinClrLst/>
@@ -576,12 +585,12 @@
   </dgm:styleLbl>
   <dgm:styleLbl name="trAlignAcc1">
     <dgm:fillClrLst meth="repeat">
-      <a:schemeClr val="lt1">
+      <a:schemeClr val="lt2">
         <a:alpha val="40000"/>
       </a:schemeClr>
     </dgm:fillClrLst>
     <dgm:linClrLst meth="repeat">
-      <a:schemeClr val="accent1"/>
+      <a:schemeClr val="dk2"/>
     </dgm:linClrLst>
     <dgm:effectClrLst/>
     <dgm:txLinClrLst/>
@@ -592,12 +601,12 @@
   </dgm:styleLbl>
   <dgm:styleLbl name="bgAcc1">
     <dgm:fillClrLst meth="repeat">
-      <a:schemeClr val="lt1">
+      <a:schemeClr val="lt2">
         <a:alpha val="90000"/>
       </a:schemeClr>
     </dgm:fillClrLst>
     <dgm:linClrLst meth="repeat">
-      <a:schemeClr val="accent1"/>
+      <a:schemeClr val="dk2"/>
     </dgm:linClrLst>
     <dgm:effectClrLst/>
     <dgm:txLinClrLst/>
@@ -608,10 +617,10 @@
   </dgm:styleLbl>
   <dgm:styleLbl name="solidFgAcc1">
     <dgm:fillClrLst meth="repeat">
-      <a:schemeClr val="lt1"/>
+      <a:schemeClr val="lt2"/>
     </dgm:fillClrLst>
     <dgm:linClrLst meth="repeat">
-      <a:schemeClr val="accent1"/>
+      <a:schemeClr val="dk2"/>
     </dgm:linClrLst>
     <dgm:effectClrLst/>
     <dgm:txLinClrLst/>
@@ -622,10 +631,10 @@
   </dgm:styleLbl>
   <dgm:styleLbl name="solidAlignAcc1">
     <dgm:fillClrLst meth="repeat">
-      <a:schemeClr val="lt1"/>
+      <a:schemeClr val="lt2"/>
     </dgm:fillClrLst>
     <dgm:linClrLst meth="repeat">
-      <a:schemeClr val="accent1"/>
+      <a:schemeClr val="dk2"/>
     </dgm:linClrLst>
     <dgm:effectClrLst/>
     <dgm:txLinClrLst/>
@@ -636,10 +645,10 @@
   </dgm:styleLbl>
   <dgm:styleLbl name="solidBgAcc1">
     <dgm:fillClrLst meth="repeat">
-      <a:schemeClr val="lt1"/>
+      <a:schemeClr val="lt2"/>
     </dgm:fillClrLst>
     <dgm:linClrLst meth="repeat">
-      <a:schemeClr val="accent1"/>
+      <a:schemeClr val="dk2"/>
     </dgm:linClrLst>
     <dgm:effectClrLst/>
     <dgm:txLinClrLst/>
@@ -650,13 +659,13 @@
   </dgm:styleLbl>
   <dgm:styleLbl name="fgAccFollowNode1">
     <dgm:fillClrLst meth="repeat">
-      <a:schemeClr val="accent1">
+      <a:schemeClr val="dk2">
         <a:alpha val="90000"/>
         <a:tint val="40000"/>
       </a:schemeClr>
     </dgm:fillClrLst>
     <dgm:linClrLst meth="repeat">
-      <a:schemeClr val="accent1">
+      <a:schemeClr val="dk2">
         <a:alpha val="90000"/>
         <a:tint val="40000"/>
       </a:schemeClr>
@@ -670,13 +679,13 @@
   </dgm:styleLbl>
   <dgm:styleLbl name="alignAccFollowNode1">
     <dgm:fillClrLst meth="repeat">
-      <a:schemeClr val="accent1">
+      <a:schemeClr val="dk2">
         <a:alpha val="90000"/>
         <a:tint val="40000"/>
       </a:schemeClr>
     </dgm:fillClrLst>
     <dgm:linClrLst meth="repeat">
-      <a:schemeClr val="accent1">
+      <a:schemeClr val="dk2">
         <a:alpha val="90000"/>
         <a:tint val="40000"/>
       </a:schemeClr>
@@ -690,13 +699,13 @@
   </dgm:styleLbl>
   <dgm:styleLbl name="bgAccFollowNode1">
     <dgm:fillClrLst meth="repeat">
-      <a:schemeClr val="accent1">
+      <a:schemeClr val="dk2">
         <a:alpha val="90000"/>
         <a:tint val="40000"/>
       </a:schemeClr>
     </dgm:fillClrLst>
     <dgm:linClrLst meth="repeat">
-      <a:schemeClr val="accent1">
+      <a:schemeClr val="dk2">
         <a:alpha val="90000"/>
         <a:tint val="40000"/>
       </a:schemeClr>
@@ -710,12 +719,12 @@
   </dgm:styleLbl>
   <dgm:styleLbl name="fgAcc0">
     <dgm:fillClrLst meth="repeat">
-      <a:schemeClr val="lt1">
+      <a:schemeClr val="lt2">
         <a:alpha val="90000"/>
       </a:schemeClr>
     </dgm:fillClrLst>
     <dgm:linClrLst meth="repeat">
-      <a:schemeClr val="accent1"/>
+      <a:schemeClr val="dk2"/>
     </dgm:linClrLst>
     <dgm:effectClrLst/>
     <dgm:txLinClrLst/>
@@ -726,12 +735,12 @@
   </dgm:styleLbl>
   <dgm:styleLbl name="fgAcc2">
     <dgm:fillClrLst meth="repeat">
-      <a:schemeClr val="lt1">
+      <a:schemeClr val="lt2">
         <a:alpha val="90000"/>
       </a:schemeClr>
     </dgm:fillClrLst>
     <dgm:linClrLst meth="repeat">
-      <a:schemeClr val="accent1"/>
+      <a:schemeClr val="dk2"/>
     </dgm:linClrLst>
     <dgm:effectClrLst/>
     <dgm:txLinClrLst/>
@@ -742,12 +751,12 @@
   </dgm:styleLbl>
   <dgm:styleLbl name="fgAcc3">
     <dgm:fillClrLst meth="repeat">
-      <a:schemeClr val="lt1">
+      <a:schemeClr val="lt2">
         <a:alpha val="90000"/>
       </a:schemeClr>
     </dgm:fillClrLst>
     <dgm:linClrLst meth="repeat">
-      <a:schemeClr val="accent1"/>
+      <a:schemeClr val="dk2"/>
     </dgm:linClrLst>
     <dgm:effectClrLst/>
     <dgm:txLinClrLst/>
@@ -758,12 +767,12 @@
   </dgm:styleLbl>
   <dgm:styleLbl name="fgAcc4">
     <dgm:fillClrLst meth="repeat">
-      <a:schemeClr val="lt1">
+      <a:schemeClr val="lt2">
         <a:alpha val="90000"/>
       </a:schemeClr>
     </dgm:fillClrLst>
     <dgm:linClrLst meth="repeat">
-      <a:schemeClr val="accent1"/>
+      <a:schemeClr val="dk2"/>
     </dgm:linClrLst>
     <dgm:effectClrLst/>
     <dgm:txLinClrLst/>
@@ -774,12 +783,12 @@
   </dgm:styleLbl>
   <dgm:styleLbl name="bgShp">
     <dgm:fillClrLst meth="repeat">
-      <a:schemeClr val="accent1">
+      <a:schemeClr val="dk2">
         <a:tint val="40000"/>
       </a:schemeClr>
     </dgm:fillClrLst>
     <dgm:linClrLst meth="repeat">
-      <a:schemeClr val="accent1"/>
+      <a:schemeClr val="dk2"/>
     </dgm:linClrLst>
     <dgm:effectClrLst/>
     <dgm:txLinClrLst/>
@@ -790,12 +799,12 @@
   </dgm:styleLbl>
   <dgm:styleLbl name="dkBgShp">
     <dgm:fillClrLst meth="repeat">
-      <a:schemeClr val="accent1">
+      <a:schemeClr val="dk2">
         <a:shade val="80000"/>
       </a:schemeClr>
     </dgm:fillClrLst>
     <dgm:linClrLst meth="repeat">
-      <a:schemeClr val="accent1"/>
+      <a:schemeClr val="dk2"/>
     </dgm:linClrLst>
     <dgm:effectClrLst/>
     <dgm:txLinClrLst/>
@@ -806,13 +815,13 @@
   </dgm:styleLbl>
   <dgm:styleLbl name="trBgShp">
     <dgm:fillClrLst meth="repeat">
-      <a:schemeClr val="accent1">
+      <a:schemeClr val="dk2">
         <a:tint val="50000"/>
         <a:alpha val="40000"/>
       </a:schemeClr>
     </dgm:fillClrLst>
     <dgm:linClrLst meth="repeat">
-      <a:schemeClr val="accent1"/>
+      <a:schemeClr val="dk2"/>
     </dgm:linClrLst>
     <dgm:effectClrLst/>
     <dgm:txLinClrLst/>
@@ -823,12 +832,12 @@
   </dgm:styleLbl>
   <dgm:styleLbl name="fgShp">
     <dgm:fillClrLst meth="repeat">
-      <a:schemeClr val="accent1">
+      <a:schemeClr val="dk2">
         <a:tint val="60000"/>
       </a:schemeClr>
     </dgm:fillClrLst>
     <dgm:linClrLst meth="repeat">
-      <a:schemeClr val="lt1"/>
+      <a:schemeClr val="lt2"/>
     </dgm:linClrLst>
     <dgm:effectClrLst/>
     <dgm:txLinClrLst/>
@@ -839,7 +848,7 @@
   </dgm:styleLbl>
   <dgm:styleLbl name="revTx">
     <dgm:fillClrLst meth="repeat">
-      <a:schemeClr val="lt1">
+      <a:schemeClr val="lt2">
         <a:alpha val="0"/>
       </a:schemeClr>
     </dgm:fillClrLst>
@@ -862,7 +871,7 @@
 <dgm:dataModel xmlns:dgm="http://schemas.openxmlformats.org/drawingml/2006/diagram" xmlns:a="http://schemas.openxmlformats.org/drawingml/2006/main">
   <dgm:ptLst>
     <dgm:pt modelId="{BCBA302D-7849-488F-85E0-E61E59429140}" type="doc">
-      <dgm:prSet loTypeId="urn:microsoft.com/office/officeart/2005/8/layout/orgChart1" loCatId="hierarchy" qsTypeId="urn:microsoft.com/office/officeart/2005/8/quickstyle/simple5" qsCatId="simple" csTypeId="urn:microsoft.com/office/officeart/2005/8/colors/accent1_2" csCatId="accent1" phldr="1"/>
+      <dgm:prSet loTypeId="urn:microsoft.com/office/officeart/2005/8/layout/orgChart1" loCatId="hierarchy" qsTypeId="urn:microsoft.com/office/officeart/2005/8/quickstyle/simple1" qsCatId="simple" csTypeId="urn:microsoft.com/office/officeart/2005/8/colors/accent0_3" csCatId="mainScheme" phldr="1"/>
       <dgm:spPr/>
       <dgm:t>
         <a:bodyPr/>
@@ -873,17 +882,17 @@
       </dgm:t>
     </dgm:pt>
     <dgm:pt modelId="{3E73C421-6307-4738-8EA6-731E90E02BD9}">
-      <dgm:prSet phldrT="[Text]"/>
+      <dgm:prSet phldrT="[Text]" custT="1"/>
       <dgm:spPr/>
       <dgm:t>
         <a:bodyPr/>
         <a:lstStyle/>
         <a:p>
           <a:r>
-            <a:rPr lang="id-ID" b="0" i="0" dirty="0"/>
+            <a:rPr lang="id-ID" sz="2400" b="1" i="0" dirty="0"/>
             <a:t>Direktur Utama</a:t>
           </a:r>
-          <a:endParaRPr lang="id-ID" dirty="0"/>
+          <a:endParaRPr lang="id-ID" sz="2400" b="1" dirty="0"/>
         </a:p>
       </dgm:t>
     </dgm:pt>
@@ -894,7 +903,7 @@
         <a:bodyPr/>
         <a:lstStyle/>
         <a:p>
-          <a:endParaRPr lang="id-ID"/>
+          <a:endParaRPr lang="id-ID" sz="1200" b="1"/>
         </a:p>
       </dgm:t>
     </dgm:pt>
@@ -905,22 +914,22 @@
         <a:bodyPr/>
         <a:lstStyle/>
         <a:p>
-          <a:endParaRPr lang="id-ID"/>
+          <a:endParaRPr lang="id-ID" sz="1200" b="1"/>
         </a:p>
       </dgm:t>
     </dgm:pt>
     <dgm:pt modelId="{70F38198-7923-4C41-BED4-8D6EDBAEFDF7}" type="asst">
-      <dgm:prSet phldrT="[Text]"/>
+      <dgm:prSet phldrT="[Text]" custT="1"/>
       <dgm:spPr/>
       <dgm:t>
         <a:bodyPr/>
         <a:lstStyle/>
         <a:p>
           <a:r>
-            <a:rPr lang="id-ID" b="0" i="0" dirty="0"/>
+            <a:rPr lang="id-ID" sz="2400" b="1" i="0" dirty="0"/>
             <a:t>Manager </a:t>
           </a:r>
-          <a:endParaRPr lang="id-ID" dirty="0"/>
+          <a:endParaRPr lang="id-ID" sz="2400" b="1" dirty="0"/>
         </a:p>
       </dgm:t>
     </dgm:pt>
@@ -931,7 +940,7 @@
         <a:bodyPr/>
         <a:lstStyle/>
         <a:p>
-          <a:endParaRPr lang="id-ID"/>
+          <a:endParaRPr lang="id-ID" sz="1200" b="1"/>
         </a:p>
       </dgm:t>
     </dgm:pt>
@@ -942,22 +951,22 @@
         <a:bodyPr/>
         <a:lstStyle/>
         <a:p>
-          <a:endParaRPr lang="id-ID"/>
+          <a:endParaRPr lang="id-ID" sz="1200" b="1"/>
         </a:p>
       </dgm:t>
     </dgm:pt>
     <dgm:pt modelId="{2F4E69BF-DA35-4AF2-9188-046F0FB52CF7}">
-      <dgm:prSet phldrT="[Text]"/>
+      <dgm:prSet phldrT="[Text]" custT="1"/>
       <dgm:spPr/>
       <dgm:t>
         <a:bodyPr/>
         <a:lstStyle/>
         <a:p>
           <a:r>
-            <a:rPr lang="id-ID" b="0" i="0" dirty="0"/>
+            <a:rPr lang="id-ID" sz="2400" b="1" i="0" dirty="0"/>
             <a:t>Staff</a:t>
           </a:r>
-          <a:endParaRPr lang="id-ID" dirty="0"/>
+          <a:endParaRPr lang="id-ID" sz="2400" b="1" dirty="0"/>
         </a:p>
       </dgm:t>
     </dgm:pt>
@@ -968,7 +977,7 @@
         <a:bodyPr/>
         <a:lstStyle/>
         <a:p>
-          <a:endParaRPr lang="id-ID"/>
+          <a:endParaRPr lang="id-ID" sz="1200" b="1"/>
         </a:p>
       </dgm:t>
     </dgm:pt>
@@ -979,22 +988,22 @@
         <a:bodyPr/>
         <a:lstStyle/>
         <a:p>
-          <a:endParaRPr lang="id-ID"/>
+          <a:endParaRPr lang="id-ID" sz="1200" b="1"/>
         </a:p>
       </dgm:t>
     </dgm:pt>
     <dgm:pt modelId="{BC2502FE-AA90-486E-8F44-BED4AB20C6F3}">
-      <dgm:prSet phldrT="[Text]"/>
+      <dgm:prSet phldrT="[Text]" custT="1"/>
       <dgm:spPr/>
       <dgm:t>
         <a:bodyPr/>
         <a:lstStyle/>
         <a:p>
           <a:r>
-            <a:rPr lang="id-ID" b="0" i="0" dirty="0"/>
+            <a:rPr lang="id-ID" sz="2400" b="1" i="0" dirty="0"/>
             <a:t>Staff</a:t>
           </a:r>
-          <a:endParaRPr lang="id-ID" dirty="0"/>
+          <a:endParaRPr lang="id-ID" sz="2400" b="1" dirty="0"/>
         </a:p>
       </dgm:t>
     </dgm:pt>
@@ -1005,7 +1014,7 @@
         <a:bodyPr/>
         <a:lstStyle/>
         <a:p>
-          <a:endParaRPr lang="id-ID"/>
+          <a:endParaRPr lang="id-ID" sz="1200" b="1"/>
         </a:p>
       </dgm:t>
     </dgm:pt>
@@ -1016,22 +1025,22 @@
         <a:bodyPr/>
         <a:lstStyle/>
         <a:p>
-          <a:endParaRPr lang="id-ID"/>
+          <a:endParaRPr lang="id-ID" sz="1200" b="1"/>
         </a:p>
       </dgm:t>
     </dgm:pt>
     <dgm:pt modelId="{33BABA36-213F-409F-9F59-CC89D86A1110}">
-      <dgm:prSet phldrT="[Text]"/>
+      <dgm:prSet phldrT="[Text]" custT="1"/>
       <dgm:spPr/>
       <dgm:t>
         <a:bodyPr/>
         <a:lstStyle/>
         <a:p>
           <a:r>
-            <a:rPr lang="id-ID" b="0" i="0" dirty="0"/>
+            <a:rPr lang="id-ID" sz="2400" b="1" i="0" dirty="0"/>
             <a:t>Staff</a:t>
           </a:r>
-          <a:endParaRPr lang="id-ID" dirty="0"/>
+          <a:endParaRPr lang="id-ID" sz="2400" b="1" dirty="0"/>
         </a:p>
       </dgm:t>
     </dgm:pt>
@@ -1042,7 +1051,7 @@
         <a:bodyPr/>
         <a:lstStyle/>
         <a:p>
-          <a:endParaRPr lang="id-ID"/>
+          <a:endParaRPr lang="id-ID" sz="1200" b="1"/>
         </a:p>
       </dgm:t>
     </dgm:pt>
@@ -1053,7 +1062,7 @@
         <a:bodyPr/>
         <a:lstStyle/>
         <a:p>
-          <a:endParaRPr lang="id-ID"/>
+          <a:endParaRPr lang="id-ID" sz="1200" b="1"/>
         </a:p>
       </dgm:t>
     </dgm:pt>
@@ -1309,6 +1318,9 @@
     <a:ext uri="http://schemas.microsoft.com/office/drawing/2008/diagram">
       <dsp:dataModelExt xmlns:dsp="http://schemas.microsoft.com/office/drawing/2008/diagram" relId="rId6" minVer="http://schemas.openxmlformats.org/drawingml/2006/diagram"/>
     </a:ext>
+    <a:ext uri="{C62137D5-CB1D-491B-B009-E17868A290BF}">
+      <dgm14:recolorImg xmlns:dgm14="http://schemas.microsoft.com/office/drawing/2010/diagram" val="1"/>
+    </a:ext>
   </dgm:extLst>
 </dgm:dataModel>
 </file>
@@ -1352,9 +1364,9 @@
           </a:pathLst>
         </a:custGeom>
         <a:noFill/>
-        <a:ln w="12700" cap="flat" cmpd="sng" algn="ctr">
+        <a:ln w="19050" cap="flat" cmpd="sng" algn="ctr">
           <a:solidFill>
-            <a:schemeClr val="accent1">
+            <a:schemeClr val="dk2">
               <a:shade val="60000"/>
               <a:hueOff val="0"/>
               <a:satOff val="0"/>
@@ -1414,9 +1426,9 @@
           </a:pathLst>
         </a:custGeom>
         <a:noFill/>
-        <a:ln w="12700" cap="flat" cmpd="sng" algn="ctr">
+        <a:ln w="19050" cap="flat" cmpd="sng" algn="ctr">
           <a:solidFill>
-            <a:schemeClr val="accent1">
+            <a:schemeClr val="dk2">
               <a:shade val="60000"/>
               <a:hueOff val="0"/>
               <a:satOff val="0"/>
@@ -1470,9 +1482,9 @@
           </a:pathLst>
         </a:custGeom>
         <a:noFill/>
-        <a:ln w="12700" cap="flat" cmpd="sng" algn="ctr">
+        <a:ln w="19050" cap="flat" cmpd="sng" algn="ctr">
           <a:solidFill>
-            <a:schemeClr val="accent1">
+            <a:schemeClr val="dk2">
               <a:shade val="60000"/>
               <a:hueOff val="0"/>
               <a:satOff val="0"/>
@@ -1532,9 +1544,9 @@
           </a:pathLst>
         </a:custGeom>
         <a:noFill/>
-        <a:ln w="12700" cap="flat" cmpd="sng" algn="ctr">
+        <a:ln w="19050" cap="flat" cmpd="sng" algn="ctr">
           <a:solidFill>
-            <a:schemeClr val="accent1">
+            <a:schemeClr val="dk2">
               <a:shade val="60000"/>
               <a:hueOff val="0"/>
               <a:satOff val="0"/>
@@ -1573,63 +1585,36 @@
         <a:prstGeom prst="rect">
           <a:avLst/>
         </a:prstGeom>
-        <a:gradFill rotWithShape="0">
-          <a:gsLst>
-            <a:gs pos="0">
-              <a:schemeClr val="accent1">
-                <a:hueOff val="0"/>
-                <a:satOff val="0"/>
-                <a:lumOff val="0"/>
-                <a:alphaOff val="0"/>
-                <a:satMod val="103000"/>
-                <a:lumMod val="102000"/>
-                <a:tint val="94000"/>
-              </a:schemeClr>
-            </a:gs>
-            <a:gs pos="50000">
-              <a:schemeClr val="accent1">
-                <a:hueOff val="0"/>
-                <a:satOff val="0"/>
-                <a:lumOff val="0"/>
-                <a:alphaOff val="0"/>
-                <a:satMod val="110000"/>
-                <a:lumMod val="100000"/>
-                <a:shade val="100000"/>
-              </a:schemeClr>
-            </a:gs>
-            <a:gs pos="100000">
-              <a:schemeClr val="accent1">
-                <a:hueOff val="0"/>
-                <a:satOff val="0"/>
-                <a:lumOff val="0"/>
-                <a:alphaOff val="0"/>
-                <a:lumMod val="99000"/>
-                <a:satMod val="120000"/>
-                <a:shade val="78000"/>
-              </a:schemeClr>
-            </a:gs>
-          </a:gsLst>
-          <a:lin ang="5400000" scaled="0"/>
-        </a:gradFill>
-        <a:ln>
-          <a:noFill/>
+        <a:solidFill>
+          <a:schemeClr val="dk2">
+            <a:hueOff val="0"/>
+            <a:satOff val="0"/>
+            <a:lumOff val="0"/>
+            <a:alphaOff val="0"/>
+          </a:schemeClr>
+        </a:solidFill>
+        <a:ln w="19050" cap="flat" cmpd="sng" algn="ctr">
+          <a:solidFill>
+            <a:schemeClr val="lt2">
+              <a:hueOff val="0"/>
+              <a:satOff val="0"/>
+              <a:lumOff val="0"/>
+              <a:alphaOff val="0"/>
+            </a:schemeClr>
+          </a:solidFill>
+          <a:prstDash val="solid"/>
+          <a:miter lim="800000"/>
         </a:ln>
-        <a:effectLst>
-          <a:outerShdw blurRad="57150" dist="19050" dir="5400000" algn="ctr" rotWithShape="0">
-            <a:srgbClr val="000000">
-              <a:alpha val="63000"/>
-            </a:srgbClr>
-          </a:outerShdw>
-        </a:effectLst>
+        <a:effectLst/>
       </dsp:spPr>
       <dsp:style>
-        <a:lnRef idx="0">
+        <a:lnRef idx="2">
           <a:scrgbClr r="0" g="0" b="0"/>
         </a:lnRef>
-        <a:fillRef idx="3">
+        <a:fillRef idx="1">
           <a:scrgbClr r="0" g="0" b="0"/>
         </a:fillRef>
-        <a:effectRef idx="3">
+        <a:effectRef idx="0">
           <a:scrgbClr r="0" g="0" b="0"/>
         </a:effectRef>
         <a:fontRef idx="minor">
@@ -1637,12 +1622,12 @@
         </a:fontRef>
       </dsp:style>
       <dsp:txBody>
-        <a:bodyPr spcFirstLastPara="0" vert="horz" wrap="square" lIns="20955" tIns="20955" rIns="20955" bIns="20955" numCol="1" spcCol="1270" anchor="ctr" anchorCtr="0">
+        <a:bodyPr spcFirstLastPara="0" vert="horz" wrap="square" lIns="15240" tIns="15240" rIns="15240" bIns="15240" numCol="1" spcCol="1270" anchor="ctr" anchorCtr="0">
           <a:noAutofit/>
         </a:bodyPr>
         <a:lstStyle/>
         <a:p>
-          <a:pPr marL="0" lvl="0" indent="0" algn="ctr" defTabSz="1466850">
+          <a:pPr marL="0" lvl="0" indent="0" algn="ctr" defTabSz="1066800">
             <a:lnSpc>
               <a:spcPct val="90000"/>
             </a:lnSpc>
@@ -1655,10 +1640,10 @@
             <a:buNone/>
           </a:pPr>
           <a:r>
-            <a:rPr lang="id-ID" sz="3300" b="0" i="0" kern="1200" dirty="0"/>
+            <a:rPr lang="id-ID" sz="2400" b="1" i="0" kern="1200" dirty="0"/>
             <a:t>Direktur Utama</a:t>
           </a:r>
-          <a:endParaRPr lang="id-ID" sz="3300" kern="1200" dirty="0"/>
+          <a:endParaRPr lang="id-ID" sz="2400" b="1" kern="1200" dirty="0"/>
         </a:p>
       </dsp:txBody>
       <dsp:txXfrm>
@@ -1679,63 +1664,36 @@
         <a:prstGeom prst="rect">
           <a:avLst/>
         </a:prstGeom>
-        <a:gradFill rotWithShape="0">
-          <a:gsLst>
-            <a:gs pos="0">
-              <a:schemeClr val="accent1">
-                <a:hueOff val="0"/>
-                <a:satOff val="0"/>
-                <a:lumOff val="0"/>
-                <a:alphaOff val="0"/>
-                <a:satMod val="103000"/>
-                <a:lumMod val="102000"/>
-                <a:tint val="94000"/>
-              </a:schemeClr>
-            </a:gs>
-            <a:gs pos="50000">
-              <a:schemeClr val="accent1">
-                <a:hueOff val="0"/>
-                <a:satOff val="0"/>
-                <a:lumOff val="0"/>
-                <a:alphaOff val="0"/>
-                <a:satMod val="110000"/>
-                <a:lumMod val="100000"/>
-                <a:shade val="100000"/>
-              </a:schemeClr>
-            </a:gs>
-            <a:gs pos="100000">
-              <a:schemeClr val="accent1">
-                <a:hueOff val="0"/>
-                <a:satOff val="0"/>
-                <a:lumOff val="0"/>
-                <a:alphaOff val="0"/>
-                <a:lumMod val="99000"/>
-                <a:satMod val="120000"/>
-                <a:shade val="78000"/>
-              </a:schemeClr>
-            </a:gs>
-          </a:gsLst>
-          <a:lin ang="5400000" scaled="0"/>
-        </a:gradFill>
-        <a:ln>
-          <a:noFill/>
+        <a:solidFill>
+          <a:schemeClr val="dk2">
+            <a:hueOff val="0"/>
+            <a:satOff val="0"/>
+            <a:lumOff val="0"/>
+            <a:alphaOff val="0"/>
+          </a:schemeClr>
+        </a:solidFill>
+        <a:ln w="19050" cap="flat" cmpd="sng" algn="ctr">
+          <a:solidFill>
+            <a:schemeClr val="lt2">
+              <a:hueOff val="0"/>
+              <a:satOff val="0"/>
+              <a:lumOff val="0"/>
+              <a:alphaOff val="0"/>
+            </a:schemeClr>
+          </a:solidFill>
+          <a:prstDash val="solid"/>
+          <a:miter lim="800000"/>
         </a:ln>
-        <a:effectLst>
-          <a:outerShdw blurRad="57150" dist="19050" dir="5400000" algn="ctr" rotWithShape="0">
-            <a:srgbClr val="000000">
-              <a:alpha val="63000"/>
-            </a:srgbClr>
-          </a:outerShdw>
-        </a:effectLst>
+        <a:effectLst/>
       </dsp:spPr>
       <dsp:style>
-        <a:lnRef idx="0">
+        <a:lnRef idx="2">
           <a:scrgbClr r="0" g="0" b="0"/>
         </a:lnRef>
-        <a:fillRef idx="3">
+        <a:fillRef idx="1">
           <a:scrgbClr r="0" g="0" b="0"/>
         </a:fillRef>
-        <a:effectRef idx="3">
+        <a:effectRef idx="0">
           <a:scrgbClr r="0" g="0" b="0"/>
         </a:effectRef>
         <a:fontRef idx="minor">
@@ -1743,12 +1701,12 @@
         </a:fontRef>
       </dsp:style>
       <dsp:txBody>
-        <a:bodyPr spcFirstLastPara="0" vert="horz" wrap="square" lIns="20955" tIns="20955" rIns="20955" bIns="20955" numCol="1" spcCol="1270" anchor="ctr" anchorCtr="0">
+        <a:bodyPr spcFirstLastPara="0" vert="horz" wrap="square" lIns="15240" tIns="15240" rIns="15240" bIns="15240" numCol="1" spcCol="1270" anchor="ctr" anchorCtr="0">
           <a:noAutofit/>
         </a:bodyPr>
         <a:lstStyle/>
         <a:p>
-          <a:pPr marL="0" lvl="0" indent="0" algn="ctr" defTabSz="1466850">
+          <a:pPr marL="0" lvl="0" indent="0" algn="ctr" defTabSz="1066800">
             <a:lnSpc>
               <a:spcPct val="90000"/>
             </a:lnSpc>
@@ -1761,10 +1719,10 @@
             <a:buNone/>
           </a:pPr>
           <a:r>
-            <a:rPr lang="id-ID" sz="3300" b="0" i="0" kern="1200" dirty="0"/>
+            <a:rPr lang="id-ID" sz="2400" b="1" i="0" kern="1200" dirty="0"/>
             <a:t>Staff</a:t>
           </a:r>
-          <a:endParaRPr lang="id-ID" sz="3300" kern="1200" dirty="0"/>
+          <a:endParaRPr lang="id-ID" sz="2400" b="1" kern="1200" dirty="0"/>
         </a:p>
       </dsp:txBody>
       <dsp:txXfrm>
@@ -1785,63 +1743,36 @@
         <a:prstGeom prst="rect">
           <a:avLst/>
         </a:prstGeom>
-        <a:gradFill rotWithShape="0">
-          <a:gsLst>
-            <a:gs pos="0">
-              <a:schemeClr val="accent1">
-                <a:hueOff val="0"/>
-                <a:satOff val="0"/>
-                <a:lumOff val="0"/>
-                <a:alphaOff val="0"/>
-                <a:satMod val="103000"/>
-                <a:lumMod val="102000"/>
-                <a:tint val="94000"/>
-              </a:schemeClr>
-            </a:gs>
-            <a:gs pos="50000">
-              <a:schemeClr val="accent1">
-                <a:hueOff val="0"/>
-                <a:satOff val="0"/>
-                <a:lumOff val="0"/>
-                <a:alphaOff val="0"/>
-                <a:satMod val="110000"/>
-                <a:lumMod val="100000"/>
-                <a:shade val="100000"/>
-              </a:schemeClr>
-            </a:gs>
-            <a:gs pos="100000">
-              <a:schemeClr val="accent1">
-                <a:hueOff val="0"/>
-                <a:satOff val="0"/>
-                <a:lumOff val="0"/>
-                <a:alphaOff val="0"/>
-                <a:lumMod val="99000"/>
-                <a:satMod val="120000"/>
-                <a:shade val="78000"/>
-              </a:schemeClr>
-            </a:gs>
-          </a:gsLst>
-          <a:lin ang="5400000" scaled="0"/>
-        </a:gradFill>
-        <a:ln>
-          <a:noFill/>
+        <a:solidFill>
+          <a:schemeClr val="dk2">
+            <a:hueOff val="0"/>
+            <a:satOff val="0"/>
+            <a:lumOff val="0"/>
+            <a:alphaOff val="0"/>
+          </a:schemeClr>
+        </a:solidFill>
+        <a:ln w="19050" cap="flat" cmpd="sng" algn="ctr">
+          <a:solidFill>
+            <a:schemeClr val="lt2">
+              <a:hueOff val="0"/>
+              <a:satOff val="0"/>
+              <a:lumOff val="0"/>
+              <a:alphaOff val="0"/>
+            </a:schemeClr>
+          </a:solidFill>
+          <a:prstDash val="solid"/>
+          <a:miter lim="800000"/>
         </a:ln>
-        <a:effectLst>
-          <a:outerShdw blurRad="57150" dist="19050" dir="5400000" algn="ctr" rotWithShape="0">
-            <a:srgbClr val="000000">
-              <a:alpha val="63000"/>
-            </a:srgbClr>
-          </a:outerShdw>
-        </a:effectLst>
+        <a:effectLst/>
       </dsp:spPr>
       <dsp:style>
-        <a:lnRef idx="0">
+        <a:lnRef idx="2">
           <a:scrgbClr r="0" g="0" b="0"/>
         </a:lnRef>
-        <a:fillRef idx="3">
+        <a:fillRef idx="1">
           <a:scrgbClr r="0" g="0" b="0"/>
         </a:fillRef>
-        <a:effectRef idx="3">
+        <a:effectRef idx="0">
           <a:scrgbClr r="0" g="0" b="0"/>
         </a:effectRef>
         <a:fontRef idx="minor">
@@ -1849,12 +1780,12 @@
         </a:fontRef>
       </dsp:style>
       <dsp:txBody>
-        <a:bodyPr spcFirstLastPara="0" vert="horz" wrap="square" lIns="20955" tIns="20955" rIns="20955" bIns="20955" numCol="1" spcCol="1270" anchor="ctr" anchorCtr="0">
+        <a:bodyPr spcFirstLastPara="0" vert="horz" wrap="square" lIns="15240" tIns="15240" rIns="15240" bIns="15240" numCol="1" spcCol="1270" anchor="ctr" anchorCtr="0">
           <a:noAutofit/>
         </a:bodyPr>
         <a:lstStyle/>
         <a:p>
-          <a:pPr marL="0" lvl="0" indent="0" algn="ctr" defTabSz="1466850">
+          <a:pPr marL="0" lvl="0" indent="0" algn="ctr" defTabSz="1066800">
             <a:lnSpc>
               <a:spcPct val="90000"/>
             </a:lnSpc>
@@ -1867,10 +1798,10 @@
             <a:buNone/>
           </a:pPr>
           <a:r>
-            <a:rPr lang="id-ID" sz="3300" b="0" i="0" kern="1200" dirty="0"/>
+            <a:rPr lang="id-ID" sz="2400" b="1" i="0" kern="1200" dirty="0"/>
             <a:t>Staff</a:t>
           </a:r>
-          <a:endParaRPr lang="id-ID" sz="3300" kern="1200" dirty="0"/>
+          <a:endParaRPr lang="id-ID" sz="2400" b="1" kern="1200" dirty="0"/>
         </a:p>
       </dsp:txBody>
       <dsp:txXfrm>
@@ -1891,63 +1822,36 @@
         <a:prstGeom prst="rect">
           <a:avLst/>
         </a:prstGeom>
-        <a:gradFill rotWithShape="0">
-          <a:gsLst>
-            <a:gs pos="0">
-              <a:schemeClr val="accent1">
-                <a:hueOff val="0"/>
-                <a:satOff val="0"/>
-                <a:lumOff val="0"/>
-                <a:alphaOff val="0"/>
-                <a:satMod val="103000"/>
-                <a:lumMod val="102000"/>
-                <a:tint val="94000"/>
-              </a:schemeClr>
-            </a:gs>
-            <a:gs pos="50000">
-              <a:schemeClr val="accent1">
-                <a:hueOff val="0"/>
-                <a:satOff val="0"/>
-                <a:lumOff val="0"/>
-                <a:alphaOff val="0"/>
-                <a:satMod val="110000"/>
-                <a:lumMod val="100000"/>
-                <a:shade val="100000"/>
-              </a:schemeClr>
-            </a:gs>
-            <a:gs pos="100000">
-              <a:schemeClr val="accent1">
-                <a:hueOff val="0"/>
-                <a:satOff val="0"/>
-                <a:lumOff val="0"/>
-                <a:alphaOff val="0"/>
-                <a:lumMod val="99000"/>
-                <a:satMod val="120000"/>
-                <a:shade val="78000"/>
-              </a:schemeClr>
-            </a:gs>
-          </a:gsLst>
-          <a:lin ang="5400000" scaled="0"/>
-        </a:gradFill>
-        <a:ln>
-          <a:noFill/>
+        <a:solidFill>
+          <a:schemeClr val="dk2">
+            <a:hueOff val="0"/>
+            <a:satOff val="0"/>
+            <a:lumOff val="0"/>
+            <a:alphaOff val="0"/>
+          </a:schemeClr>
+        </a:solidFill>
+        <a:ln w="19050" cap="flat" cmpd="sng" algn="ctr">
+          <a:solidFill>
+            <a:schemeClr val="lt2">
+              <a:hueOff val="0"/>
+              <a:satOff val="0"/>
+              <a:lumOff val="0"/>
+              <a:alphaOff val="0"/>
+            </a:schemeClr>
+          </a:solidFill>
+          <a:prstDash val="solid"/>
+          <a:miter lim="800000"/>
         </a:ln>
-        <a:effectLst>
-          <a:outerShdw blurRad="57150" dist="19050" dir="5400000" algn="ctr" rotWithShape="0">
-            <a:srgbClr val="000000">
-              <a:alpha val="63000"/>
-            </a:srgbClr>
-          </a:outerShdw>
-        </a:effectLst>
+        <a:effectLst/>
       </dsp:spPr>
       <dsp:style>
-        <a:lnRef idx="0">
+        <a:lnRef idx="2">
           <a:scrgbClr r="0" g="0" b="0"/>
         </a:lnRef>
-        <a:fillRef idx="3">
+        <a:fillRef idx="1">
           <a:scrgbClr r="0" g="0" b="0"/>
         </a:fillRef>
-        <a:effectRef idx="3">
+        <a:effectRef idx="0">
           <a:scrgbClr r="0" g="0" b="0"/>
         </a:effectRef>
         <a:fontRef idx="minor">
@@ -1955,12 +1859,12 @@
         </a:fontRef>
       </dsp:style>
       <dsp:txBody>
-        <a:bodyPr spcFirstLastPara="0" vert="horz" wrap="square" lIns="20955" tIns="20955" rIns="20955" bIns="20955" numCol="1" spcCol="1270" anchor="ctr" anchorCtr="0">
+        <a:bodyPr spcFirstLastPara="0" vert="horz" wrap="square" lIns="15240" tIns="15240" rIns="15240" bIns="15240" numCol="1" spcCol="1270" anchor="ctr" anchorCtr="0">
           <a:noAutofit/>
         </a:bodyPr>
         <a:lstStyle/>
         <a:p>
-          <a:pPr marL="0" lvl="0" indent="0" algn="ctr" defTabSz="1466850">
+          <a:pPr marL="0" lvl="0" indent="0" algn="ctr" defTabSz="1066800">
             <a:lnSpc>
               <a:spcPct val="90000"/>
             </a:lnSpc>
@@ -1973,10 +1877,10 @@
             <a:buNone/>
           </a:pPr>
           <a:r>
-            <a:rPr lang="id-ID" sz="3300" b="0" i="0" kern="1200" dirty="0"/>
+            <a:rPr lang="id-ID" sz="2400" b="1" i="0" kern="1200" dirty="0"/>
             <a:t>Staff</a:t>
           </a:r>
-          <a:endParaRPr lang="id-ID" sz="3300" kern="1200" dirty="0"/>
+          <a:endParaRPr lang="id-ID" sz="2400" b="1" kern="1200" dirty="0"/>
         </a:p>
       </dsp:txBody>
       <dsp:txXfrm>
@@ -1997,63 +1901,36 @@
         <a:prstGeom prst="rect">
           <a:avLst/>
         </a:prstGeom>
-        <a:gradFill rotWithShape="0">
-          <a:gsLst>
-            <a:gs pos="0">
-              <a:schemeClr val="accent1">
-                <a:hueOff val="0"/>
-                <a:satOff val="0"/>
-                <a:lumOff val="0"/>
-                <a:alphaOff val="0"/>
-                <a:satMod val="103000"/>
-                <a:lumMod val="102000"/>
-                <a:tint val="94000"/>
-              </a:schemeClr>
-            </a:gs>
-            <a:gs pos="50000">
-              <a:schemeClr val="accent1">
-                <a:hueOff val="0"/>
-                <a:satOff val="0"/>
-                <a:lumOff val="0"/>
-                <a:alphaOff val="0"/>
-                <a:satMod val="110000"/>
-                <a:lumMod val="100000"/>
-                <a:shade val="100000"/>
-              </a:schemeClr>
-            </a:gs>
-            <a:gs pos="100000">
-              <a:schemeClr val="accent1">
-                <a:hueOff val="0"/>
-                <a:satOff val="0"/>
-                <a:lumOff val="0"/>
-                <a:alphaOff val="0"/>
-                <a:lumMod val="99000"/>
-                <a:satMod val="120000"/>
-                <a:shade val="78000"/>
-              </a:schemeClr>
-            </a:gs>
-          </a:gsLst>
-          <a:lin ang="5400000" scaled="0"/>
-        </a:gradFill>
-        <a:ln>
-          <a:noFill/>
+        <a:solidFill>
+          <a:schemeClr val="dk2">
+            <a:hueOff val="0"/>
+            <a:satOff val="0"/>
+            <a:lumOff val="0"/>
+            <a:alphaOff val="0"/>
+          </a:schemeClr>
+        </a:solidFill>
+        <a:ln w="19050" cap="flat" cmpd="sng" algn="ctr">
+          <a:solidFill>
+            <a:schemeClr val="lt2">
+              <a:hueOff val="0"/>
+              <a:satOff val="0"/>
+              <a:lumOff val="0"/>
+              <a:alphaOff val="0"/>
+            </a:schemeClr>
+          </a:solidFill>
+          <a:prstDash val="solid"/>
+          <a:miter lim="800000"/>
         </a:ln>
-        <a:effectLst>
-          <a:outerShdw blurRad="57150" dist="19050" dir="5400000" algn="ctr" rotWithShape="0">
-            <a:srgbClr val="000000">
-              <a:alpha val="63000"/>
-            </a:srgbClr>
-          </a:outerShdw>
-        </a:effectLst>
+        <a:effectLst/>
       </dsp:spPr>
       <dsp:style>
-        <a:lnRef idx="0">
+        <a:lnRef idx="2">
           <a:scrgbClr r="0" g="0" b="0"/>
         </a:lnRef>
-        <a:fillRef idx="3">
+        <a:fillRef idx="1">
           <a:scrgbClr r="0" g="0" b="0"/>
         </a:fillRef>
-        <a:effectRef idx="3">
+        <a:effectRef idx="0">
           <a:scrgbClr r="0" g="0" b="0"/>
         </a:effectRef>
         <a:fontRef idx="minor">
@@ -2061,12 +1938,12 @@
         </a:fontRef>
       </dsp:style>
       <dsp:txBody>
-        <a:bodyPr spcFirstLastPara="0" vert="horz" wrap="square" lIns="20955" tIns="20955" rIns="20955" bIns="20955" numCol="1" spcCol="1270" anchor="ctr" anchorCtr="0">
+        <a:bodyPr spcFirstLastPara="0" vert="horz" wrap="square" lIns="15240" tIns="15240" rIns="15240" bIns="15240" numCol="1" spcCol="1270" anchor="ctr" anchorCtr="0">
           <a:noAutofit/>
         </a:bodyPr>
         <a:lstStyle/>
         <a:p>
-          <a:pPr marL="0" lvl="0" indent="0" algn="ctr" defTabSz="1466850">
+          <a:pPr marL="0" lvl="0" indent="0" algn="ctr" defTabSz="1066800">
             <a:lnSpc>
               <a:spcPct val="90000"/>
             </a:lnSpc>
@@ -2079,10 +1956,10 @@
             <a:buNone/>
           </a:pPr>
           <a:r>
-            <a:rPr lang="id-ID" sz="3300" b="0" i="0" kern="1200" dirty="0"/>
+            <a:rPr lang="id-ID" sz="2400" b="1" i="0" kern="1200" dirty="0"/>
             <a:t>Manager </a:t>
           </a:r>
-          <a:endParaRPr lang="id-ID" sz="3300" kern="1200" dirty="0"/>
+          <a:endParaRPr lang="id-ID" sz="2400" b="1" kern="1200" dirty="0"/>
         </a:p>
       </dsp:txBody>
       <dsp:txXfrm>
@@ -3241,11 +3118,11 @@
 </file>
 
 <file path=ppt/diagrams/quickStyle1.xml><?xml version="1.0" encoding="utf-8"?>
-<dgm:styleDef xmlns:dgm="http://schemas.openxmlformats.org/drawingml/2006/diagram" xmlns:a="http://schemas.openxmlformats.org/drawingml/2006/main" uniqueId="urn:microsoft.com/office/officeart/2005/8/quickstyle/simple5">
+<dgm:styleDef xmlns:dgm="http://schemas.openxmlformats.org/drawingml/2006/diagram" xmlns:a="http://schemas.openxmlformats.org/drawingml/2006/main" uniqueId="urn:microsoft.com/office/officeart/2005/8/quickstyle/simple1">
   <dgm:title val=""/>
   <dgm:desc val=""/>
   <dgm:catLst>
-    <dgm:cat type="simple" pri="10500"/>
+    <dgm:cat type="simple" pri="10100"/>
   </dgm:catLst>
   <dgm:scene3d>
     <a:camera prst="orthographicFront"/>
@@ -3259,13 +3136,13 @@
     <dgm:sp3d/>
     <dgm:txPr/>
     <dgm:style>
-      <a:lnRef idx="0">
+      <a:lnRef idx="2">
         <a:scrgbClr r="0" g="0" b="0"/>
       </a:lnRef>
-      <a:fillRef idx="3">
+      <a:fillRef idx="1">
         <a:scrgbClr r="0" g="0" b="0"/>
       </a:fillRef>
-      <a:effectRef idx="3">
+      <a:effectRef idx="0">
         <a:scrgbClr r="0" g="0" b="0"/>
       </a:effectRef>
       <a:fontRef idx="minor">
@@ -3281,13 +3158,13 @@
     <dgm:sp3d/>
     <dgm:txPr/>
     <dgm:style>
-      <a:lnRef idx="0">
+      <a:lnRef idx="2">
         <a:scrgbClr r="0" g="0" b="0"/>
       </a:lnRef>
-      <a:fillRef idx="3">
+      <a:fillRef idx="1">
         <a:scrgbClr r="0" g="0" b="0"/>
       </a:fillRef>
-      <a:effectRef idx="3">
+      <a:effectRef idx="0">
         <a:scrgbClr r="0" g="0" b="0"/>
       </a:effectRef>
       <a:fontRef idx="minor">
@@ -3303,13 +3180,13 @@
     <dgm:sp3d/>
     <dgm:txPr/>
     <dgm:style>
-      <a:lnRef idx="0">
+      <a:lnRef idx="2">
         <a:scrgbClr r="0" g="0" b="0"/>
       </a:lnRef>
-      <a:fillRef idx="3">
+      <a:fillRef idx="1">
         <a:scrgbClr r="0" g="0" b="0"/>
       </a:fillRef>
-      <a:effectRef idx="3">
+      <a:effectRef idx="0">
         <a:scrgbClr r="0" g="0" b="0"/>
       </a:effectRef>
       <a:fontRef idx="minor">
@@ -3325,13 +3202,13 @@
     <dgm:sp3d/>
     <dgm:txPr/>
     <dgm:style>
-      <a:lnRef idx="1">
+      <a:lnRef idx="2">
         <a:scrgbClr r="0" g="0" b="0"/>
       </a:lnRef>
-      <a:fillRef idx="3">
+      <a:fillRef idx="1">
         <a:scrgbClr r="0" g="0" b="0"/>
       </a:fillRef>
-      <a:effectRef idx="3">
+      <a:effectRef idx="0">
         <a:scrgbClr r="0" g="0" b="0"/>
       </a:effectRef>
       <a:fontRef idx="minor">
@@ -3347,13 +3224,13 @@
     <dgm:sp3d/>
     <dgm:txPr/>
     <dgm:style>
-      <a:lnRef idx="0">
+      <a:lnRef idx="2">
         <a:scrgbClr r="0" g="0" b="0"/>
       </a:lnRef>
-      <a:fillRef idx="3">
+      <a:fillRef idx="1">
         <a:scrgbClr r="0" g="0" b="0"/>
       </a:fillRef>
-      <a:effectRef idx="3">
+      <a:effectRef idx="0">
         <a:scrgbClr r="0" g="0" b="0"/>
       </a:effectRef>
       <a:fontRef idx="minor">
@@ -3369,13 +3246,13 @@
     <dgm:sp3d/>
     <dgm:txPr/>
     <dgm:style>
-      <a:lnRef idx="0">
+      <a:lnRef idx="2">
         <a:scrgbClr r="0" g="0" b="0"/>
       </a:lnRef>
-      <a:fillRef idx="3">
+      <a:fillRef idx="1">
         <a:scrgbClr r="0" g="0" b="0"/>
       </a:fillRef>
-      <a:effectRef idx="3">
+      <a:effectRef idx="0">
         <a:scrgbClr r="0" g="0" b="0"/>
       </a:effectRef>
       <a:fontRef idx="minor">
@@ -3391,13 +3268,13 @@
     <dgm:sp3d/>
     <dgm:txPr/>
     <dgm:style>
-      <a:lnRef idx="0">
+      <a:lnRef idx="2">
         <a:scrgbClr r="0" g="0" b="0"/>
       </a:lnRef>
-      <a:fillRef idx="3">
+      <a:fillRef idx="1">
         <a:scrgbClr r="0" g="0" b="0"/>
       </a:fillRef>
-      <a:effectRef idx="3">
+      <a:effectRef idx="0">
         <a:scrgbClr r="0" g="0" b="0"/>
       </a:effectRef>
       <a:fontRef idx="minor">
@@ -3413,13 +3290,13 @@
     <dgm:sp3d/>
     <dgm:txPr/>
     <dgm:style>
-      <a:lnRef idx="0">
+      <a:lnRef idx="2">
         <a:scrgbClr r="0" g="0" b="0"/>
       </a:lnRef>
-      <a:fillRef idx="3">
+      <a:fillRef idx="1">
         <a:scrgbClr r="0" g="0" b="0"/>
       </a:fillRef>
-      <a:effectRef idx="3">
+      <a:effectRef idx="0">
         <a:scrgbClr r="0" g="0" b="0"/>
       </a:effectRef>
       <a:fontRef idx="minor">
@@ -3435,13 +3312,13 @@
     <dgm:sp3d/>
     <dgm:txPr/>
     <dgm:style>
-      <a:lnRef idx="0">
+      <a:lnRef idx="2">
         <a:scrgbClr r="0" g="0" b="0"/>
       </a:lnRef>
       <a:fillRef idx="1">
         <a:scrgbClr r="0" g="0" b="0"/>
       </a:fillRef>
-      <a:effectRef idx="3">
+      <a:effectRef idx="0">
         <a:scrgbClr r="0" g="0" b="0"/>
       </a:effectRef>
       <a:fontRef idx="minor"/>
@@ -3455,13 +3332,13 @@
     <dgm:sp3d/>
     <dgm:txPr/>
     <dgm:style>
-      <a:lnRef idx="0">
+      <a:lnRef idx="2">
         <a:scrgbClr r="0" g="0" b="0"/>
       </a:lnRef>
       <a:fillRef idx="1">
         <a:scrgbClr r="0" g="0" b="0"/>
       </a:fillRef>
-      <a:effectRef idx="3">
+      <a:effectRef idx="0">
         <a:scrgbClr r="0" g="0" b="0"/>
       </a:effectRef>
       <a:fontRef idx="minor"/>
@@ -3475,13 +3352,13 @@
     <dgm:sp3d/>
     <dgm:txPr/>
     <dgm:style>
-      <a:lnRef idx="0">
+      <a:lnRef idx="2">
         <a:scrgbClr r="0" g="0" b="0"/>
       </a:lnRef>
       <a:fillRef idx="1">
         <a:scrgbClr r="0" g="0" b="0"/>
       </a:fillRef>
-      <a:effectRef idx="3">
+      <a:effectRef idx="0">
         <a:scrgbClr r="0" g="0" b="0"/>
       </a:effectRef>
       <a:fontRef idx="minor"/>
@@ -3498,10 +3375,10 @@
       <a:lnRef idx="0">
         <a:scrgbClr r="0" g="0" b="0"/>
       </a:lnRef>
-      <a:fillRef idx="3">
+      <a:fillRef idx="1">
         <a:scrgbClr r="0" g="0" b="0"/>
       </a:fillRef>
-      <a:effectRef idx="3">
+      <a:effectRef idx="0">
         <a:scrgbClr r="0" g="0" b="0"/>
       </a:effectRef>
       <a:fontRef idx="minor">
@@ -3520,10 +3397,10 @@
       <a:lnRef idx="0">
         <a:scrgbClr r="0" g="0" b="0"/>
       </a:lnRef>
-      <a:fillRef idx="3">
+      <a:fillRef idx="1">
         <a:scrgbClr r="0" g="0" b="0"/>
       </a:fillRef>
-      <a:effectRef idx="3">
+      <a:effectRef idx="0">
         <a:scrgbClr r="0" g="0" b="0"/>
       </a:effectRef>
       <a:fontRef idx="minor">
@@ -3542,10 +3419,10 @@
       <a:lnRef idx="0">
         <a:scrgbClr r="0" g="0" b="0"/>
       </a:lnRef>
-      <a:fillRef idx="3">
+      <a:fillRef idx="1">
         <a:scrgbClr r="0" g="0" b="0"/>
       </a:fillRef>
-      <a:effectRef idx="3">
+      <a:effectRef idx="0">
         <a:scrgbClr r="0" g="0" b="0"/>
       </a:effectRef>
       <a:fontRef idx="minor">
@@ -3581,13 +3458,13 @@
     <dgm:sp3d/>
     <dgm:txPr/>
     <dgm:style>
-      <a:lnRef idx="1">
+      <a:lnRef idx="2">
         <a:scrgbClr r="0" g="0" b="0"/>
       </a:lnRef>
-      <a:fillRef idx="0">
+      <a:fillRef idx="1">
         <a:scrgbClr r="0" g="0" b="0"/>
       </a:fillRef>
-      <a:effectRef idx="1">
+      <a:effectRef idx="0">
         <a:scrgbClr r="0" g="0" b="0"/>
       </a:effectRef>
       <a:fontRef idx="minor"/>
@@ -3601,13 +3478,13 @@
     <dgm:sp3d/>
     <dgm:txPr/>
     <dgm:style>
-      <a:lnRef idx="0">
+      <a:lnRef idx="2">
         <a:scrgbClr r="0" g="0" b="0"/>
       </a:lnRef>
-      <a:fillRef idx="3">
+      <a:fillRef idx="1">
         <a:scrgbClr r="0" g="0" b="0"/>
       </a:fillRef>
-      <a:effectRef idx="3">
+      <a:effectRef idx="0">
         <a:scrgbClr r="0" g="0" b="0"/>
       </a:effectRef>
       <a:fontRef idx="minor">
@@ -3623,13 +3500,13 @@
     <dgm:sp3d/>
     <dgm:txPr/>
     <dgm:style>
-      <a:lnRef idx="0">
+      <a:lnRef idx="2">
         <a:scrgbClr r="0" g="0" b="0"/>
       </a:lnRef>
-      <a:fillRef idx="3">
+      <a:fillRef idx="1">
         <a:scrgbClr r="0" g="0" b="0"/>
       </a:fillRef>
-      <a:effectRef idx="3">
+      <a:effectRef idx="0">
         <a:scrgbClr r="0" g="0" b="0"/>
       </a:effectRef>
       <a:fontRef idx="minor">
@@ -3645,13 +3522,13 @@
     <dgm:sp3d/>
     <dgm:txPr/>
     <dgm:style>
-      <a:lnRef idx="0">
+      <a:lnRef idx="2">
         <a:scrgbClr r="0" g="0" b="0"/>
       </a:lnRef>
-      <a:fillRef idx="3">
+      <a:fillRef idx="1">
         <a:scrgbClr r="0" g="0" b="0"/>
       </a:fillRef>
-      <a:effectRef idx="3">
+      <a:effectRef idx="0">
         <a:scrgbClr r="0" g="0" b="0"/>
       </a:effectRef>
       <a:fontRef idx="minor">
@@ -3667,13 +3544,13 @@
     <dgm:sp3d/>
     <dgm:txPr/>
     <dgm:style>
-      <a:lnRef idx="0">
+      <a:lnRef idx="2">
         <a:scrgbClr r="0" g="0" b="0"/>
       </a:lnRef>
-      <a:fillRef idx="3">
+      <a:fillRef idx="1">
         <a:scrgbClr r="0" g="0" b="0"/>
       </a:fillRef>
-      <a:effectRef idx="3">
+      <a:effectRef idx="0">
         <a:scrgbClr r="0" g="0" b="0"/>
       </a:effectRef>
       <a:fontRef idx="minor">
@@ -3689,13 +3566,13 @@
     <dgm:sp3d/>
     <dgm:txPr/>
     <dgm:style>
-      <a:lnRef idx="0">
+      <a:lnRef idx="2">
         <a:scrgbClr r="0" g="0" b="0"/>
       </a:lnRef>
-      <a:fillRef idx="3">
+      <a:fillRef idx="1">
         <a:scrgbClr r="0" g="0" b="0"/>
       </a:fillRef>
-      <a:effectRef idx="3">
+      <a:effectRef idx="0">
         <a:scrgbClr r="0" g="0" b="0"/>
       </a:effectRef>
       <a:fontRef idx="minor">
@@ -3711,13 +3588,13 @@
     <dgm:sp3d/>
     <dgm:txPr/>
     <dgm:style>
-      <a:lnRef idx="0">
+      <a:lnRef idx="2">
         <a:scrgbClr r="0" g="0" b="0"/>
       </a:lnRef>
-      <a:fillRef idx="3">
+      <a:fillRef idx="1">
         <a:scrgbClr r="0" g="0" b="0"/>
       </a:fillRef>
-      <a:effectRef idx="3">
+      <a:effectRef idx="0">
         <a:scrgbClr r="0" g="0" b="0"/>
       </a:effectRef>
       <a:fontRef idx="minor">
@@ -3733,13 +3610,13 @@
     <dgm:sp3d/>
     <dgm:txPr/>
     <dgm:style>
-      <a:lnRef idx="0">
+      <a:lnRef idx="2">
         <a:scrgbClr r="0" g="0" b="0"/>
       </a:lnRef>
-      <a:fillRef idx="3">
+      <a:fillRef idx="1">
         <a:scrgbClr r="0" g="0" b="0"/>
       </a:fillRef>
-      <a:effectRef idx="3">
+      <a:effectRef idx="0">
         <a:scrgbClr r="0" g="0" b="0"/>
       </a:effectRef>
       <a:fontRef idx="minor">
@@ -3755,13 +3632,13 @@
     <dgm:sp3d/>
     <dgm:txPr/>
     <dgm:style>
-      <a:lnRef idx="0">
+      <a:lnRef idx="2">
         <a:scrgbClr r="0" g="0" b="0"/>
       </a:lnRef>
-      <a:fillRef idx="3">
+      <a:fillRef idx="1">
         <a:scrgbClr r="0" g="0" b="0"/>
       </a:fillRef>
-      <a:effectRef idx="3">
+      <a:effectRef idx="0">
         <a:scrgbClr r="0" g="0" b="0"/>
       </a:effectRef>
       <a:fontRef idx="minor">
@@ -3777,13 +3654,13 @@
     <dgm:sp3d/>
     <dgm:txPr/>
     <dgm:style>
-      <a:lnRef idx="0">
+      <a:lnRef idx="2">
         <a:scrgbClr r="0" g="0" b="0"/>
       </a:lnRef>
-      <a:fillRef idx="3">
+      <a:fillRef idx="1">
         <a:scrgbClr r="0" g="0" b="0"/>
       </a:fillRef>
-      <a:effectRef idx="3">
+      <a:effectRef idx="0">
         <a:scrgbClr r="0" g="0" b="0"/>
       </a:effectRef>
       <a:fontRef idx="minor">
@@ -3879,13 +3756,13 @@
     <dgm:sp3d/>
     <dgm:txPr/>
     <dgm:style>
-      <a:lnRef idx="1">
+      <a:lnRef idx="2">
         <a:scrgbClr r="0" g="0" b="0"/>
       </a:lnRef>
       <a:fillRef idx="1">
         <a:scrgbClr r="0" g="0" b="0"/>
       </a:fillRef>
-      <a:effectRef idx="2">
+      <a:effectRef idx="0">
         <a:scrgbClr r="0" g="0" b="0"/>
       </a:effectRef>
       <a:fontRef idx="minor"/>
@@ -3899,13 +3776,13 @@
     <dgm:sp3d/>
     <dgm:txPr/>
     <dgm:style>
-      <a:lnRef idx="1">
+      <a:lnRef idx="2">
         <a:scrgbClr r="0" g="0" b="0"/>
       </a:lnRef>
       <a:fillRef idx="1">
         <a:scrgbClr r="0" g="0" b="0"/>
       </a:fillRef>
-      <a:effectRef idx="2">
+      <a:effectRef idx="0">
         <a:scrgbClr r="0" g="0" b="0"/>
       </a:effectRef>
       <a:fontRef idx="minor"/>
@@ -3919,13 +3796,13 @@
     <dgm:sp3d/>
     <dgm:txPr/>
     <dgm:style>
-      <a:lnRef idx="1">
+      <a:lnRef idx="2">
         <a:scrgbClr r="0" g="0" b="0"/>
       </a:lnRef>
       <a:fillRef idx="1">
         <a:scrgbClr r="0" g="0" b="0"/>
       </a:fillRef>
-      <a:effectRef idx="2">
+      <a:effectRef idx="0">
         <a:scrgbClr r="0" g="0" b="0"/>
       </a:effectRef>
       <a:fontRef idx="minor"/>
@@ -3959,13 +3836,13 @@
     <dgm:sp3d/>
     <dgm:txPr/>
     <dgm:style>
-      <a:lnRef idx="1">
+      <a:lnRef idx="2">
         <a:scrgbClr r="0" g="0" b="0"/>
       </a:lnRef>
       <a:fillRef idx="1">
         <a:scrgbClr r="0" g="0" b="0"/>
       </a:fillRef>
-      <a:effectRef idx="2">
+      <a:effectRef idx="0">
         <a:scrgbClr r="0" g="0" b="0"/>
       </a:effectRef>
       <a:fontRef idx="minor"/>
@@ -3979,13 +3856,13 @@
     <dgm:sp3d/>
     <dgm:txPr/>
     <dgm:style>
-      <a:lnRef idx="1">
+      <a:lnRef idx="2">
         <a:scrgbClr r="0" g="0" b="0"/>
       </a:lnRef>
       <a:fillRef idx="1">
         <a:scrgbClr r="0" g="0" b="0"/>
       </a:fillRef>
-      <a:effectRef idx="2">
+      <a:effectRef idx="0">
         <a:scrgbClr r="0" g="0" b="0"/>
       </a:effectRef>
       <a:fontRef idx="minor"/>
@@ -3999,13 +3876,13 @@
     <dgm:sp3d/>
     <dgm:txPr/>
     <dgm:style>
-      <a:lnRef idx="1">
+      <a:lnRef idx="2">
         <a:scrgbClr r="0" g="0" b="0"/>
       </a:lnRef>
       <a:fillRef idx="1">
         <a:scrgbClr r="0" g="0" b="0"/>
       </a:fillRef>
-      <a:effectRef idx="3">
+      <a:effectRef idx="0">
         <a:scrgbClr r="0" g="0" b="0"/>
       </a:effectRef>
       <a:fontRef idx="minor"/>
@@ -4019,13 +3896,13 @@
     <dgm:sp3d/>
     <dgm:txPr/>
     <dgm:style>
-      <a:lnRef idx="1">
+      <a:lnRef idx="2">
         <a:scrgbClr r="0" g="0" b="0"/>
       </a:lnRef>
       <a:fillRef idx="1">
         <a:scrgbClr r="0" g="0" b="0"/>
       </a:fillRef>
-      <a:effectRef idx="3">
+      <a:effectRef idx="0">
         <a:scrgbClr r="0" g="0" b="0"/>
       </a:effectRef>
       <a:fontRef idx="minor"/>
@@ -4039,13 +3916,13 @@
     <dgm:sp3d/>
     <dgm:txPr/>
     <dgm:style>
-      <a:lnRef idx="1">
+      <a:lnRef idx="2">
         <a:scrgbClr r="0" g="0" b="0"/>
       </a:lnRef>
       <a:fillRef idx="1">
         <a:scrgbClr r="0" g="0" b="0"/>
       </a:fillRef>
-      <a:effectRef idx="2">
+      <a:effectRef idx="0">
         <a:scrgbClr r="0" g="0" b="0"/>
       </a:effectRef>
       <a:fontRef idx="minor"/>
@@ -4059,13 +3936,13 @@
     <dgm:sp3d/>
     <dgm:txPr/>
     <dgm:style>
-      <a:lnRef idx="1">
+      <a:lnRef idx="2">
         <a:scrgbClr r="0" g="0" b="0"/>
       </a:lnRef>
       <a:fillRef idx="1">
         <a:scrgbClr r="0" g="0" b="0"/>
       </a:fillRef>
-      <a:effectRef idx="2">
+      <a:effectRef idx="0">
         <a:scrgbClr r="0" g="0" b="0"/>
       </a:effectRef>
       <a:fontRef idx="minor"/>
@@ -4079,13 +3956,13 @@
     <dgm:sp3d/>
     <dgm:txPr/>
     <dgm:style>
-      <a:lnRef idx="1">
+      <a:lnRef idx="2">
         <a:scrgbClr r="0" g="0" b="0"/>
       </a:lnRef>
       <a:fillRef idx="1">
         <a:scrgbClr r="0" g="0" b="0"/>
       </a:fillRef>
-      <a:effectRef idx="2">
+      <a:effectRef idx="0">
         <a:scrgbClr r="0" g="0" b="0"/>
       </a:effectRef>
       <a:fontRef idx="minor"/>
@@ -4099,13 +3976,13 @@
     <dgm:sp3d/>
     <dgm:txPr/>
     <dgm:style>
-      <a:lnRef idx="1">
+      <a:lnRef idx="2">
         <a:scrgbClr r="0" g="0" b="0"/>
       </a:lnRef>
       <a:fillRef idx="1">
         <a:scrgbClr r="0" g="0" b="0"/>
       </a:fillRef>
-      <a:effectRef idx="2">
+      <a:effectRef idx="0">
         <a:scrgbClr r="0" g="0" b="0"/>
       </a:effectRef>
       <a:fontRef idx="minor"/>
@@ -4119,13 +3996,13 @@
     <dgm:sp3d/>
     <dgm:txPr/>
     <dgm:style>
-      <a:lnRef idx="1">
+      <a:lnRef idx="2">
         <a:scrgbClr r="0" g="0" b="0"/>
       </a:lnRef>
       <a:fillRef idx="1">
         <a:scrgbClr r="0" g="0" b="0"/>
       </a:fillRef>
-      <a:effectRef idx="2">
+      <a:effectRef idx="0">
         <a:scrgbClr r="0" g="0" b="0"/>
       </a:effectRef>
       <a:fontRef idx="minor"/>
@@ -4139,13 +4016,13 @@
     <dgm:sp3d/>
     <dgm:txPr/>
     <dgm:style>
-      <a:lnRef idx="1">
+      <a:lnRef idx="2">
         <a:scrgbClr r="0" g="0" b="0"/>
       </a:lnRef>
       <a:fillRef idx="1">
         <a:scrgbClr r="0" g="0" b="0"/>
       </a:fillRef>
-      <a:effectRef idx="2">
+      <a:effectRef idx="0">
         <a:scrgbClr r="0" g="0" b="0"/>
       </a:effectRef>
       <a:fontRef idx="minor"/>
@@ -4159,13 +4036,13 @@
     <dgm:sp3d/>
     <dgm:txPr/>
     <dgm:style>
-      <a:lnRef idx="1">
+      <a:lnRef idx="2">
         <a:scrgbClr r="0" g="0" b="0"/>
       </a:lnRef>
       <a:fillRef idx="1">
         <a:scrgbClr r="0" g="0" b="0"/>
       </a:fillRef>
-      <a:effectRef idx="2">
+      <a:effectRef idx="0">
         <a:scrgbClr r="0" g="0" b="0"/>
       </a:effectRef>
       <a:fontRef idx="minor"/>
@@ -4185,7 +4062,7 @@
       <a:fillRef idx="1">
         <a:scrgbClr r="0" g="0" b="0"/>
       </a:fillRef>
-      <a:effectRef idx="2">
+      <a:effectRef idx="0">
         <a:scrgbClr r="0" g="0" b="0"/>
       </a:effectRef>
       <a:fontRef idx="minor"/>
@@ -4205,7 +4082,7 @@
       <a:fillRef idx="1">
         <a:scrgbClr r="0" g="0" b="0"/>
       </a:fillRef>
-      <a:effectRef idx="3">
+      <a:effectRef idx="0">
         <a:scrgbClr r="0" g="0" b="0"/>
       </a:effectRef>
       <a:fontRef idx="minor"/>
@@ -4239,13 +4116,13 @@
     <dgm:sp3d/>
     <dgm:txPr/>
     <dgm:style>
-      <a:lnRef idx="0">
+      <a:lnRef idx="2">
         <a:scrgbClr r="0" g="0" b="0"/>
       </a:lnRef>
-      <a:fillRef idx="3">
+      <a:fillRef idx="1">
         <a:scrgbClr r="0" g="0" b="0"/>
       </a:fillRef>
-      <a:effectRef idx="3">
+      <a:effectRef idx="0">
         <a:scrgbClr r="0" g="0" b="0"/>
       </a:effectRef>
       <a:fontRef idx="minor"/>
@@ -4296,7 +4173,7 @@
           <p:cNvPr id="2" name="Title 1">
             <a:extLst>
               <a:ext uri="{FF2B5EF4-FFF2-40B4-BE49-F238E27FC236}">
-                <a16:creationId xmlns:a16="http://schemas.microsoft.com/office/drawing/2014/main" id="{2177E4C0-C3AD-4BF0-8C7A-228CBE41A13D}"/>
+                <a16:creationId xmlns:a16="http://schemas.microsoft.com/office/drawing/2014/main" id="{32014C79-84A3-F8B6-999F-B12D20E9F3F6}"/>
               </a:ext>
             </a:extLst>
           </p:cNvPr>
@@ -4334,7 +4211,7 @@
           <p:cNvPr id="3" name="Subtitle 2">
             <a:extLst>
               <a:ext uri="{FF2B5EF4-FFF2-40B4-BE49-F238E27FC236}">
-                <a16:creationId xmlns:a16="http://schemas.microsoft.com/office/drawing/2014/main" id="{9EBDAA88-419D-4DBF-94FC-F7121428C11B}"/>
+                <a16:creationId xmlns:a16="http://schemas.microsoft.com/office/drawing/2014/main" id="{077738D2-8688-EEE2-ADD2-6B124B64E489}"/>
               </a:ext>
             </a:extLst>
           </p:cNvPr>
@@ -4405,7 +4282,7 @@
           <p:cNvPr id="4" name="Date Placeholder 3">
             <a:extLst>
               <a:ext uri="{FF2B5EF4-FFF2-40B4-BE49-F238E27FC236}">
-                <a16:creationId xmlns:a16="http://schemas.microsoft.com/office/drawing/2014/main" id="{4D9497CD-5281-4F1B-A70E-7D72C667814F}"/>
+                <a16:creationId xmlns:a16="http://schemas.microsoft.com/office/drawing/2014/main" id="{054D1FAC-EAF2-A94A-CF15-4D16F5E5E6DB}"/>
               </a:ext>
             </a:extLst>
           </p:cNvPr>
@@ -4423,7 +4300,7 @@
           <a:p>
             <a:fld id="{A187CB15-DB72-4ABB-BC39-4D1142C87911}" type="datetimeFigureOut">
               <a:rPr lang="id-ID" smtClean="0"/>
-              <a:t>24/06/2026</a:t>
+              <a:t>13/07/2026</a:t>
             </a:fld>
             <a:endParaRPr lang="id-ID"/>
           </a:p>
@@ -4434,7 +4311,7 @@
           <p:cNvPr id="5" name="Footer Placeholder 4">
             <a:extLst>
               <a:ext uri="{FF2B5EF4-FFF2-40B4-BE49-F238E27FC236}">
-                <a16:creationId xmlns:a16="http://schemas.microsoft.com/office/drawing/2014/main" id="{C2F06E25-8964-4B01-B660-D593D85AF6C3}"/>
+                <a16:creationId xmlns:a16="http://schemas.microsoft.com/office/drawing/2014/main" id="{E5DE8E79-1F82-A8EC-779C-001B434A339B}"/>
               </a:ext>
             </a:extLst>
           </p:cNvPr>
@@ -4459,7 +4336,7 @@
           <p:cNvPr id="6" name="Slide Number Placeholder 5">
             <a:extLst>
               <a:ext uri="{FF2B5EF4-FFF2-40B4-BE49-F238E27FC236}">
-                <a16:creationId xmlns:a16="http://schemas.microsoft.com/office/drawing/2014/main" id="{811B71C7-9236-4507-92B1-D5A46E4300A1}"/>
+                <a16:creationId xmlns:a16="http://schemas.microsoft.com/office/drawing/2014/main" id="{8264C51D-B6F3-C776-A03F-21F5612638B1}"/>
               </a:ext>
             </a:extLst>
           </p:cNvPr>
@@ -4486,7 +4363,7 @@
     </p:spTree>
     <p:extLst>
       <p:ext uri="{BB962C8B-B14F-4D97-AF65-F5344CB8AC3E}">
-        <p14:creationId xmlns:p14="http://schemas.microsoft.com/office/powerpoint/2010/main" val="2216070860"/>
+        <p14:creationId xmlns:p14="http://schemas.microsoft.com/office/powerpoint/2010/main" val="591348596"/>
       </p:ext>
     </p:extLst>
   </p:cSld>
@@ -4518,7 +4395,7 @@
           <p:cNvPr id="2" name="Title 1">
             <a:extLst>
               <a:ext uri="{FF2B5EF4-FFF2-40B4-BE49-F238E27FC236}">
-                <a16:creationId xmlns:a16="http://schemas.microsoft.com/office/drawing/2014/main" id="{4DC2EFAB-6CB0-403D-9641-B70CE44A2ACB}"/>
+                <a16:creationId xmlns:a16="http://schemas.microsoft.com/office/drawing/2014/main" id="{FC550D10-14B4-414A-11A7-3C755F5F2780}"/>
               </a:ext>
             </a:extLst>
           </p:cNvPr>
@@ -4547,7 +4424,7 @@
           <p:cNvPr id="3" name="Vertical Text Placeholder 2">
             <a:extLst>
               <a:ext uri="{FF2B5EF4-FFF2-40B4-BE49-F238E27FC236}">
-                <a16:creationId xmlns:a16="http://schemas.microsoft.com/office/drawing/2014/main" id="{874E7C47-C843-41CE-94F8-9FB5733AC03B}"/>
+                <a16:creationId xmlns:a16="http://schemas.microsoft.com/office/drawing/2014/main" id="{ACEBA8D2-ECF9-69CA-27B0-582E36F57CE0}"/>
               </a:ext>
             </a:extLst>
           </p:cNvPr>
@@ -4605,7 +4482,7 @@
           <p:cNvPr id="4" name="Date Placeholder 3">
             <a:extLst>
               <a:ext uri="{FF2B5EF4-FFF2-40B4-BE49-F238E27FC236}">
-                <a16:creationId xmlns:a16="http://schemas.microsoft.com/office/drawing/2014/main" id="{C6E6330A-512C-4A5C-B715-3541F1C87595}"/>
+                <a16:creationId xmlns:a16="http://schemas.microsoft.com/office/drawing/2014/main" id="{FD8A1F90-E6FA-82B7-44F8-59E76D385D32}"/>
               </a:ext>
             </a:extLst>
           </p:cNvPr>
@@ -4623,7 +4500,7 @@
           <a:p>
             <a:fld id="{A187CB15-DB72-4ABB-BC39-4D1142C87911}" type="datetimeFigureOut">
               <a:rPr lang="id-ID" smtClean="0"/>
-              <a:t>24/06/2026</a:t>
+              <a:t>13/07/2026</a:t>
             </a:fld>
             <a:endParaRPr lang="id-ID"/>
           </a:p>
@@ -4634,7 +4511,7 @@
           <p:cNvPr id="5" name="Footer Placeholder 4">
             <a:extLst>
               <a:ext uri="{FF2B5EF4-FFF2-40B4-BE49-F238E27FC236}">
-                <a16:creationId xmlns:a16="http://schemas.microsoft.com/office/drawing/2014/main" id="{19EFEA30-528C-46BD-AE42-F216A25E4C44}"/>
+                <a16:creationId xmlns:a16="http://schemas.microsoft.com/office/drawing/2014/main" id="{2FAA91FC-93AE-BC27-3DC5-04D18A822913}"/>
               </a:ext>
             </a:extLst>
           </p:cNvPr>
@@ -4659,7 +4536,7 @@
           <p:cNvPr id="6" name="Slide Number Placeholder 5">
             <a:extLst>
               <a:ext uri="{FF2B5EF4-FFF2-40B4-BE49-F238E27FC236}">
-                <a16:creationId xmlns:a16="http://schemas.microsoft.com/office/drawing/2014/main" id="{1850FB19-8D50-4B9B-928B-AF3E851E2001}"/>
+                <a16:creationId xmlns:a16="http://schemas.microsoft.com/office/drawing/2014/main" id="{F26119FF-AD92-CC99-334C-75F78D4290FD}"/>
               </a:ext>
             </a:extLst>
           </p:cNvPr>
@@ -4686,7 +4563,7 @@
     </p:spTree>
     <p:extLst>
       <p:ext uri="{BB962C8B-B14F-4D97-AF65-F5344CB8AC3E}">
-        <p14:creationId xmlns:p14="http://schemas.microsoft.com/office/powerpoint/2010/main" val="699875617"/>
+        <p14:creationId xmlns:p14="http://schemas.microsoft.com/office/powerpoint/2010/main" val="103673353"/>
       </p:ext>
     </p:extLst>
   </p:cSld>
@@ -4718,7 +4595,7 @@
           <p:cNvPr id="2" name="Vertical Title 1">
             <a:extLst>
               <a:ext uri="{FF2B5EF4-FFF2-40B4-BE49-F238E27FC236}">
-                <a16:creationId xmlns:a16="http://schemas.microsoft.com/office/drawing/2014/main" id="{FF35B388-2375-4F50-9768-5C2E0447AAB2}"/>
+                <a16:creationId xmlns:a16="http://schemas.microsoft.com/office/drawing/2014/main" id="{15C3724C-C792-5FE3-493F-A108F69A6E3C}"/>
               </a:ext>
             </a:extLst>
           </p:cNvPr>
@@ -4752,7 +4629,7 @@
           <p:cNvPr id="3" name="Vertical Text Placeholder 2">
             <a:extLst>
               <a:ext uri="{FF2B5EF4-FFF2-40B4-BE49-F238E27FC236}">
-                <a16:creationId xmlns:a16="http://schemas.microsoft.com/office/drawing/2014/main" id="{2C640CC9-1F63-4AD8-A0E7-F87A4517F89B}"/>
+                <a16:creationId xmlns:a16="http://schemas.microsoft.com/office/drawing/2014/main" id="{1F6C0D63-5C5E-0D5D-82A6-F6C04C8C14AC}"/>
               </a:ext>
             </a:extLst>
           </p:cNvPr>
@@ -4815,7 +4692,7 @@
           <p:cNvPr id="4" name="Date Placeholder 3">
             <a:extLst>
               <a:ext uri="{FF2B5EF4-FFF2-40B4-BE49-F238E27FC236}">
-                <a16:creationId xmlns:a16="http://schemas.microsoft.com/office/drawing/2014/main" id="{6E54F179-6C5A-4CAE-8649-E42ED7D16CC9}"/>
+                <a16:creationId xmlns:a16="http://schemas.microsoft.com/office/drawing/2014/main" id="{575ADDA1-13BC-46FC-619B-CBF7382BB8DC}"/>
               </a:ext>
             </a:extLst>
           </p:cNvPr>
@@ -4833,7 +4710,7 @@
           <a:p>
             <a:fld id="{A187CB15-DB72-4ABB-BC39-4D1142C87911}" type="datetimeFigureOut">
               <a:rPr lang="id-ID" smtClean="0"/>
-              <a:t>24/06/2026</a:t>
+              <a:t>13/07/2026</a:t>
             </a:fld>
             <a:endParaRPr lang="id-ID"/>
           </a:p>
@@ -4844,7 +4721,7 @@
           <p:cNvPr id="5" name="Footer Placeholder 4">
             <a:extLst>
               <a:ext uri="{FF2B5EF4-FFF2-40B4-BE49-F238E27FC236}">
-                <a16:creationId xmlns:a16="http://schemas.microsoft.com/office/drawing/2014/main" id="{B0BD7936-D11E-49F9-88BB-EA1B7CEFF7A5}"/>
+                <a16:creationId xmlns:a16="http://schemas.microsoft.com/office/drawing/2014/main" id="{B6DCFD46-C09B-3406-4051-CC3F23EB33C9}"/>
               </a:ext>
             </a:extLst>
           </p:cNvPr>
@@ -4869,7 +4746,7 @@
           <p:cNvPr id="6" name="Slide Number Placeholder 5">
             <a:extLst>
               <a:ext uri="{FF2B5EF4-FFF2-40B4-BE49-F238E27FC236}">
-                <a16:creationId xmlns:a16="http://schemas.microsoft.com/office/drawing/2014/main" id="{7F8738AA-459D-4427-9AFD-0FF2A20FF527}"/>
+                <a16:creationId xmlns:a16="http://schemas.microsoft.com/office/drawing/2014/main" id="{892AFCA1-209C-1E88-A9AF-835E5F337D28}"/>
               </a:ext>
             </a:extLst>
           </p:cNvPr>
@@ -4896,7 +4773,7 @@
     </p:spTree>
     <p:extLst>
       <p:ext uri="{BB962C8B-B14F-4D97-AF65-F5344CB8AC3E}">
-        <p14:creationId xmlns:p14="http://schemas.microsoft.com/office/powerpoint/2010/main" val="2985746055"/>
+        <p14:creationId xmlns:p14="http://schemas.microsoft.com/office/powerpoint/2010/main" val="4137041312"/>
       </p:ext>
     </p:extLst>
   </p:cSld>
@@ -4928,7 +4805,7 @@
           <p:cNvPr id="2" name="Title 1">
             <a:extLst>
               <a:ext uri="{FF2B5EF4-FFF2-40B4-BE49-F238E27FC236}">
-                <a16:creationId xmlns:a16="http://schemas.microsoft.com/office/drawing/2014/main" id="{94104DF1-655C-437B-A935-793F03D4B7DF}"/>
+                <a16:creationId xmlns:a16="http://schemas.microsoft.com/office/drawing/2014/main" id="{612926D8-CC8C-0C0D-0B1B-D9942C098AC9}"/>
               </a:ext>
             </a:extLst>
           </p:cNvPr>
@@ -4957,7 +4834,7 @@
           <p:cNvPr id="3" name="Content Placeholder 2">
             <a:extLst>
               <a:ext uri="{FF2B5EF4-FFF2-40B4-BE49-F238E27FC236}">
-                <a16:creationId xmlns:a16="http://schemas.microsoft.com/office/drawing/2014/main" id="{D4DC346A-E8FC-45A4-AF4D-62A18CD32859}"/>
+                <a16:creationId xmlns:a16="http://schemas.microsoft.com/office/drawing/2014/main" id="{528FE42A-F695-7325-9319-883F14ECFAC1}"/>
               </a:ext>
             </a:extLst>
           </p:cNvPr>
@@ -5015,7 +4892,7 @@
           <p:cNvPr id="4" name="Date Placeholder 3">
             <a:extLst>
               <a:ext uri="{FF2B5EF4-FFF2-40B4-BE49-F238E27FC236}">
-                <a16:creationId xmlns:a16="http://schemas.microsoft.com/office/drawing/2014/main" id="{371649C0-E761-4990-8572-FB4DFDF567F6}"/>
+                <a16:creationId xmlns:a16="http://schemas.microsoft.com/office/drawing/2014/main" id="{13C2922E-6ABF-0AC8-A4DB-6DF4B68E7FD7}"/>
               </a:ext>
             </a:extLst>
           </p:cNvPr>
@@ -5033,7 +4910,7 @@
           <a:p>
             <a:fld id="{A187CB15-DB72-4ABB-BC39-4D1142C87911}" type="datetimeFigureOut">
               <a:rPr lang="id-ID" smtClean="0"/>
-              <a:t>24/06/2026</a:t>
+              <a:t>13/07/2026</a:t>
             </a:fld>
             <a:endParaRPr lang="id-ID"/>
           </a:p>
@@ -5044,7 +4921,7 @@
           <p:cNvPr id="5" name="Footer Placeholder 4">
             <a:extLst>
               <a:ext uri="{FF2B5EF4-FFF2-40B4-BE49-F238E27FC236}">
-                <a16:creationId xmlns:a16="http://schemas.microsoft.com/office/drawing/2014/main" id="{C707F649-508D-4B18-8012-3F6C53F27F97}"/>
+                <a16:creationId xmlns:a16="http://schemas.microsoft.com/office/drawing/2014/main" id="{A1462A14-4541-6D0B-52A5-E42E865E5435}"/>
               </a:ext>
             </a:extLst>
           </p:cNvPr>
@@ -5069,7 +4946,7 @@
           <p:cNvPr id="6" name="Slide Number Placeholder 5">
             <a:extLst>
               <a:ext uri="{FF2B5EF4-FFF2-40B4-BE49-F238E27FC236}">
-                <a16:creationId xmlns:a16="http://schemas.microsoft.com/office/drawing/2014/main" id="{2192CAD5-C330-49FB-9588-144DCB0CF7EA}"/>
+                <a16:creationId xmlns:a16="http://schemas.microsoft.com/office/drawing/2014/main" id="{309E1A6F-B269-C237-691A-9370D52DF8F5}"/>
               </a:ext>
             </a:extLst>
           </p:cNvPr>
@@ -5096,7 +4973,7 @@
     </p:spTree>
     <p:extLst>
       <p:ext uri="{BB962C8B-B14F-4D97-AF65-F5344CB8AC3E}">
-        <p14:creationId xmlns:p14="http://schemas.microsoft.com/office/powerpoint/2010/main" val="832341679"/>
+        <p14:creationId xmlns:p14="http://schemas.microsoft.com/office/powerpoint/2010/main" val="804699171"/>
       </p:ext>
     </p:extLst>
   </p:cSld>
@@ -5128,7 +5005,7 @@
           <p:cNvPr id="2" name="Title 1">
             <a:extLst>
               <a:ext uri="{FF2B5EF4-FFF2-40B4-BE49-F238E27FC236}">
-                <a16:creationId xmlns:a16="http://schemas.microsoft.com/office/drawing/2014/main" id="{448995E1-E9F2-447A-84A0-7DB6D9C61504}"/>
+                <a16:creationId xmlns:a16="http://schemas.microsoft.com/office/drawing/2014/main" id="{8D05EAD1-6CD0-6358-5209-BFFEE696E464}"/>
               </a:ext>
             </a:extLst>
           </p:cNvPr>
@@ -5166,7 +5043,7 @@
           <p:cNvPr id="3" name="Text Placeholder 2">
             <a:extLst>
               <a:ext uri="{FF2B5EF4-FFF2-40B4-BE49-F238E27FC236}">
-                <a16:creationId xmlns:a16="http://schemas.microsoft.com/office/drawing/2014/main" id="{EF26B439-3B01-4A3C-90B7-CF6ED4534490}"/>
+                <a16:creationId xmlns:a16="http://schemas.microsoft.com/office/drawing/2014/main" id="{733446C2-4FEE-8978-AD91-47C7B4E943B5}"/>
               </a:ext>
             </a:extLst>
           </p:cNvPr>
@@ -5191,7 +5068,7 @@
               <a:defRPr sz="2400">
                 <a:solidFill>
                   <a:schemeClr val="tx1">
-                    <a:tint val="75000"/>
+                    <a:tint val="82000"/>
                   </a:schemeClr>
                 </a:solidFill>
               </a:defRPr>
@@ -5201,7 +5078,7 @@
               <a:defRPr sz="2000">
                 <a:solidFill>
                   <a:schemeClr val="tx1">
-                    <a:tint val="75000"/>
+                    <a:tint val="82000"/>
                   </a:schemeClr>
                 </a:solidFill>
               </a:defRPr>
@@ -5211,7 +5088,7 @@
               <a:defRPr sz="1800">
                 <a:solidFill>
                   <a:schemeClr val="tx1">
-                    <a:tint val="75000"/>
+                    <a:tint val="82000"/>
                   </a:schemeClr>
                 </a:solidFill>
               </a:defRPr>
@@ -5221,7 +5098,7 @@
               <a:defRPr sz="1600">
                 <a:solidFill>
                   <a:schemeClr val="tx1">
-                    <a:tint val="75000"/>
+                    <a:tint val="82000"/>
                   </a:schemeClr>
                 </a:solidFill>
               </a:defRPr>
@@ -5231,7 +5108,7 @@
               <a:defRPr sz="1600">
                 <a:solidFill>
                   <a:schemeClr val="tx1">
-                    <a:tint val="75000"/>
+                    <a:tint val="82000"/>
                   </a:schemeClr>
                 </a:solidFill>
               </a:defRPr>
@@ -5241,7 +5118,7 @@
               <a:defRPr sz="1600">
                 <a:solidFill>
                   <a:schemeClr val="tx1">
-                    <a:tint val="75000"/>
+                    <a:tint val="82000"/>
                   </a:schemeClr>
                 </a:solidFill>
               </a:defRPr>
@@ -5251,7 +5128,7 @@
               <a:defRPr sz="1600">
                 <a:solidFill>
                   <a:schemeClr val="tx1">
-                    <a:tint val="75000"/>
+                    <a:tint val="82000"/>
                   </a:schemeClr>
                 </a:solidFill>
               </a:defRPr>
@@ -5261,7 +5138,7 @@
               <a:defRPr sz="1600">
                 <a:solidFill>
                   <a:schemeClr val="tx1">
-                    <a:tint val="75000"/>
+                    <a:tint val="82000"/>
                   </a:schemeClr>
                 </a:solidFill>
               </a:defRPr>
@@ -5271,7 +5148,7 @@
               <a:defRPr sz="1600">
                 <a:solidFill>
                   <a:schemeClr val="tx1">
-                    <a:tint val="75000"/>
+                    <a:tint val="82000"/>
                   </a:schemeClr>
                 </a:solidFill>
               </a:defRPr>
@@ -5291,7 +5168,7 @@
           <p:cNvPr id="4" name="Date Placeholder 3">
             <a:extLst>
               <a:ext uri="{FF2B5EF4-FFF2-40B4-BE49-F238E27FC236}">
-                <a16:creationId xmlns:a16="http://schemas.microsoft.com/office/drawing/2014/main" id="{9B598D06-AD88-42F4-85E7-29741B27B7E7}"/>
+                <a16:creationId xmlns:a16="http://schemas.microsoft.com/office/drawing/2014/main" id="{2A2B7937-7850-079C-3BC4-EE44C895C3F1}"/>
               </a:ext>
             </a:extLst>
           </p:cNvPr>
@@ -5309,7 +5186,7 @@
           <a:p>
             <a:fld id="{A187CB15-DB72-4ABB-BC39-4D1142C87911}" type="datetimeFigureOut">
               <a:rPr lang="id-ID" smtClean="0"/>
-              <a:t>24/06/2026</a:t>
+              <a:t>13/07/2026</a:t>
             </a:fld>
             <a:endParaRPr lang="id-ID"/>
           </a:p>
@@ -5320,7 +5197,7 @@
           <p:cNvPr id="5" name="Footer Placeholder 4">
             <a:extLst>
               <a:ext uri="{FF2B5EF4-FFF2-40B4-BE49-F238E27FC236}">
-                <a16:creationId xmlns:a16="http://schemas.microsoft.com/office/drawing/2014/main" id="{CEA8F913-F9C0-4594-8E1C-AAEDBCEC5467}"/>
+                <a16:creationId xmlns:a16="http://schemas.microsoft.com/office/drawing/2014/main" id="{A3D17229-1C5C-1649-EABB-5E5FECFAE1FF}"/>
               </a:ext>
             </a:extLst>
           </p:cNvPr>
@@ -5345,7 +5222,7 @@
           <p:cNvPr id="6" name="Slide Number Placeholder 5">
             <a:extLst>
               <a:ext uri="{FF2B5EF4-FFF2-40B4-BE49-F238E27FC236}">
-                <a16:creationId xmlns:a16="http://schemas.microsoft.com/office/drawing/2014/main" id="{DE53C432-B8F6-4053-90E0-F66AC3BD5DDF}"/>
+                <a16:creationId xmlns:a16="http://schemas.microsoft.com/office/drawing/2014/main" id="{44188DD0-595A-9123-4CA5-3B3B0BA411CE}"/>
               </a:ext>
             </a:extLst>
           </p:cNvPr>
@@ -5372,7 +5249,7 @@
     </p:spTree>
     <p:extLst>
       <p:ext uri="{BB962C8B-B14F-4D97-AF65-F5344CB8AC3E}">
-        <p14:creationId xmlns:p14="http://schemas.microsoft.com/office/powerpoint/2010/main" val="496695610"/>
+        <p14:creationId xmlns:p14="http://schemas.microsoft.com/office/powerpoint/2010/main" val="1617781660"/>
       </p:ext>
     </p:extLst>
   </p:cSld>
@@ -5404,7 +5281,7 @@
           <p:cNvPr id="2" name="Title 1">
             <a:extLst>
               <a:ext uri="{FF2B5EF4-FFF2-40B4-BE49-F238E27FC236}">
-                <a16:creationId xmlns:a16="http://schemas.microsoft.com/office/drawing/2014/main" id="{CBAFA311-EFCA-42E0-A30D-3E1CADF0720A}"/>
+                <a16:creationId xmlns:a16="http://schemas.microsoft.com/office/drawing/2014/main" id="{91671A93-3D24-745D-5704-B103DE5C98D8}"/>
               </a:ext>
             </a:extLst>
           </p:cNvPr>
@@ -5433,7 +5310,7 @@
           <p:cNvPr id="3" name="Content Placeholder 2">
             <a:extLst>
               <a:ext uri="{FF2B5EF4-FFF2-40B4-BE49-F238E27FC236}">
-                <a16:creationId xmlns:a16="http://schemas.microsoft.com/office/drawing/2014/main" id="{8C87DD28-1CA5-4510-9EAC-EE3A87DF62C1}"/>
+                <a16:creationId xmlns:a16="http://schemas.microsoft.com/office/drawing/2014/main" id="{707E8A92-2E17-7316-5230-19833E94EDDA}"/>
               </a:ext>
             </a:extLst>
           </p:cNvPr>
@@ -5496,7 +5373,7 @@
           <p:cNvPr id="4" name="Content Placeholder 3">
             <a:extLst>
               <a:ext uri="{FF2B5EF4-FFF2-40B4-BE49-F238E27FC236}">
-                <a16:creationId xmlns:a16="http://schemas.microsoft.com/office/drawing/2014/main" id="{790F0A28-66F7-4F01-8E09-C13BBEE41AF6}"/>
+                <a16:creationId xmlns:a16="http://schemas.microsoft.com/office/drawing/2014/main" id="{22C67E37-061C-3E82-52F6-D586417B3250}"/>
               </a:ext>
             </a:extLst>
           </p:cNvPr>
@@ -5559,7 +5436,7 @@
           <p:cNvPr id="5" name="Date Placeholder 4">
             <a:extLst>
               <a:ext uri="{FF2B5EF4-FFF2-40B4-BE49-F238E27FC236}">
-                <a16:creationId xmlns:a16="http://schemas.microsoft.com/office/drawing/2014/main" id="{184591B0-9683-42E3-877D-B34C890B1103}"/>
+                <a16:creationId xmlns:a16="http://schemas.microsoft.com/office/drawing/2014/main" id="{47674861-E1CC-A2FF-8766-F3ADB3DDD3E9}"/>
               </a:ext>
             </a:extLst>
           </p:cNvPr>
@@ -5577,7 +5454,7 @@
           <a:p>
             <a:fld id="{A187CB15-DB72-4ABB-BC39-4D1142C87911}" type="datetimeFigureOut">
               <a:rPr lang="id-ID" smtClean="0"/>
-              <a:t>24/06/2026</a:t>
+              <a:t>13/07/2026</a:t>
             </a:fld>
             <a:endParaRPr lang="id-ID"/>
           </a:p>
@@ -5588,7 +5465,7 @@
           <p:cNvPr id="6" name="Footer Placeholder 5">
             <a:extLst>
               <a:ext uri="{FF2B5EF4-FFF2-40B4-BE49-F238E27FC236}">
-                <a16:creationId xmlns:a16="http://schemas.microsoft.com/office/drawing/2014/main" id="{06DF5B7C-4B53-4584-A2B3-657795544484}"/>
+                <a16:creationId xmlns:a16="http://schemas.microsoft.com/office/drawing/2014/main" id="{B76F038E-2F92-BDE2-EF7D-84E7CE8D5ECA}"/>
               </a:ext>
             </a:extLst>
           </p:cNvPr>
@@ -5613,7 +5490,7 @@
           <p:cNvPr id="7" name="Slide Number Placeholder 6">
             <a:extLst>
               <a:ext uri="{FF2B5EF4-FFF2-40B4-BE49-F238E27FC236}">
-                <a16:creationId xmlns:a16="http://schemas.microsoft.com/office/drawing/2014/main" id="{48E2770A-F897-4817-AF51-4080DA8615AF}"/>
+                <a16:creationId xmlns:a16="http://schemas.microsoft.com/office/drawing/2014/main" id="{D527F878-68F3-CC62-D113-8230C7A8F54B}"/>
               </a:ext>
             </a:extLst>
           </p:cNvPr>
@@ -5640,7 +5517,7 @@
     </p:spTree>
     <p:extLst>
       <p:ext uri="{BB962C8B-B14F-4D97-AF65-F5344CB8AC3E}">
-        <p14:creationId xmlns:p14="http://schemas.microsoft.com/office/powerpoint/2010/main" val="3280312395"/>
+        <p14:creationId xmlns:p14="http://schemas.microsoft.com/office/powerpoint/2010/main" val="2098636909"/>
       </p:ext>
     </p:extLst>
   </p:cSld>
@@ -5672,7 +5549,7 @@
           <p:cNvPr id="2" name="Title 1">
             <a:extLst>
               <a:ext uri="{FF2B5EF4-FFF2-40B4-BE49-F238E27FC236}">
-                <a16:creationId xmlns:a16="http://schemas.microsoft.com/office/drawing/2014/main" id="{A3F05C8D-DD6B-46DE-8BD8-657A760F6521}"/>
+                <a16:creationId xmlns:a16="http://schemas.microsoft.com/office/drawing/2014/main" id="{A06D2650-62C3-479C-0DAE-65107053A437}"/>
               </a:ext>
             </a:extLst>
           </p:cNvPr>
@@ -5706,7 +5583,7 @@
           <p:cNvPr id="3" name="Text Placeholder 2">
             <a:extLst>
               <a:ext uri="{FF2B5EF4-FFF2-40B4-BE49-F238E27FC236}">
-                <a16:creationId xmlns:a16="http://schemas.microsoft.com/office/drawing/2014/main" id="{6BEAE236-E990-4A29-A305-C9843204E77B}"/>
+                <a16:creationId xmlns:a16="http://schemas.microsoft.com/office/drawing/2014/main" id="{A9084A63-134E-749D-E50E-C5AF1C221303}"/>
               </a:ext>
             </a:extLst>
           </p:cNvPr>
@@ -5777,7 +5654,7 @@
           <p:cNvPr id="4" name="Content Placeholder 3">
             <a:extLst>
               <a:ext uri="{FF2B5EF4-FFF2-40B4-BE49-F238E27FC236}">
-                <a16:creationId xmlns:a16="http://schemas.microsoft.com/office/drawing/2014/main" id="{8195F6D4-45D5-443B-9C3B-911038105467}"/>
+                <a16:creationId xmlns:a16="http://schemas.microsoft.com/office/drawing/2014/main" id="{A25FFCA2-2026-FDB4-D89B-B4E431876035}"/>
               </a:ext>
             </a:extLst>
           </p:cNvPr>
@@ -5840,7 +5717,7 @@
           <p:cNvPr id="5" name="Text Placeholder 4">
             <a:extLst>
               <a:ext uri="{FF2B5EF4-FFF2-40B4-BE49-F238E27FC236}">
-                <a16:creationId xmlns:a16="http://schemas.microsoft.com/office/drawing/2014/main" id="{54325BB3-F298-4C59-979D-236B6DCEC5B9}"/>
+                <a16:creationId xmlns:a16="http://schemas.microsoft.com/office/drawing/2014/main" id="{DF6AE0A8-7BE2-DB20-AA1D-5B4565383C5A}"/>
               </a:ext>
             </a:extLst>
           </p:cNvPr>
@@ -5911,7 +5788,7 @@
           <p:cNvPr id="6" name="Content Placeholder 5">
             <a:extLst>
               <a:ext uri="{FF2B5EF4-FFF2-40B4-BE49-F238E27FC236}">
-                <a16:creationId xmlns:a16="http://schemas.microsoft.com/office/drawing/2014/main" id="{6D7273B1-7E33-4B31-B4B9-C02EAF6B401D}"/>
+                <a16:creationId xmlns:a16="http://schemas.microsoft.com/office/drawing/2014/main" id="{FED22D73-0217-9EC5-2FFA-132E4CC28F13}"/>
               </a:ext>
             </a:extLst>
           </p:cNvPr>
@@ -5974,7 +5851,7 @@
           <p:cNvPr id="7" name="Date Placeholder 6">
             <a:extLst>
               <a:ext uri="{FF2B5EF4-FFF2-40B4-BE49-F238E27FC236}">
-                <a16:creationId xmlns:a16="http://schemas.microsoft.com/office/drawing/2014/main" id="{5091C24E-4E52-44A4-B2FD-EFAE1D50808E}"/>
+                <a16:creationId xmlns:a16="http://schemas.microsoft.com/office/drawing/2014/main" id="{A0FEB132-9203-35A7-FD5F-023448D5B76D}"/>
               </a:ext>
             </a:extLst>
           </p:cNvPr>
@@ -5992,7 +5869,7 @@
           <a:p>
             <a:fld id="{A187CB15-DB72-4ABB-BC39-4D1142C87911}" type="datetimeFigureOut">
               <a:rPr lang="id-ID" smtClean="0"/>
-              <a:t>24/06/2026</a:t>
+              <a:t>13/07/2026</a:t>
             </a:fld>
             <a:endParaRPr lang="id-ID"/>
           </a:p>
@@ -6003,7 +5880,7 @@
           <p:cNvPr id="8" name="Footer Placeholder 7">
             <a:extLst>
               <a:ext uri="{FF2B5EF4-FFF2-40B4-BE49-F238E27FC236}">
-                <a16:creationId xmlns:a16="http://schemas.microsoft.com/office/drawing/2014/main" id="{8B43DF64-75B9-43D6-9F3B-608AC0717841}"/>
+                <a16:creationId xmlns:a16="http://schemas.microsoft.com/office/drawing/2014/main" id="{D36E6927-5DA7-1A99-8223-FFA235AF1B96}"/>
               </a:ext>
             </a:extLst>
           </p:cNvPr>
@@ -6028,7 +5905,7 @@
           <p:cNvPr id="9" name="Slide Number Placeholder 8">
             <a:extLst>
               <a:ext uri="{FF2B5EF4-FFF2-40B4-BE49-F238E27FC236}">
-                <a16:creationId xmlns:a16="http://schemas.microsoft.com/office/drawing/2014/main" id="{FC6E5989-617B-43C3-9B13-78DB2B30BA72}"/>
+                <a16:creationId xmlns:a16="http://schemas.microsoft.com/office/drawing/2014/main" id="{D93E473B-CE63-B4DB-A010-4ECAA1FA2337}"/>
               </a:ext>
             </a:extLst>
           </p:cNvPr>
@@ -6055,7 +5932,7 @@
     </p:spTree>
     <p:extLst>
       <p:ext uri="{BB962C8B-B14F-4D97-AF65-F5344CB8AC3E}">
-        <p14:creationId xmlns:p14="http://schemas.microsoft.com/office/powerpoint/2010/main" val="1588137327"/>
+        <p14:creationId xmlns:p14="http://schemas.microsoft.com/office/powerpoint/2010/main" val="3612030984"/>
       </p:ext>
     </p:extLst>
   </p:cSld>
@@ -6087,7 +5964,7 @@
           <p:cNvPr id="2" name="Title 1">
             <a:extLst>
               <a:ext uri="{FF2B5EF4-FFF2-40B4-BE49-F238E27FC236}">
-                <a16:creationId xmlns:a16="http://schemas.microsoft.com/office/drawing/2014/main" id="{F6E885D5-6A23-4DB0-99B9-905951A18F76}"/>
+                <a16:creationId xmlns:a16="http://schemas.microsoft.com/office/drawing/2014/main" id="{BA0BC908-0E8C-7B20-B907-A34294AB4033}"/>
               </a:ext>
             </a:extLst>
           </p:cNvPr>
@@ -6116,7 +5993,7 @@
           <p:cNvPr id="3" name="Date Placeholder 2">
             <a:extLst>
               <a:ext uri="{FF2B5EF4-FFF2-40B4-BE49-F238E27FC236}">
-                <a16:creationId xmlns:a16="http://schemas.microsoft.com/office/drawing/2014/main" id="{9F1EAE07-D436-4522-AF68-2A694C471786}"/>
+                <a16:creationId xmlns:a16="http://schemas.microsoft.com/office/drawing/2014/main" id="{583B8396-5837-F5BB-B737-9BC3AEC3877A}"/>
               </a:ext>
             </a:extLst>
           </p:cNvPr>
@@ -6134,7 +6011,7 @@
           <a:p>
             <a:fld id="{A187CB15-DB72-4ABB-BC39-4D1142C87911}" type="datetimeFigureOut">
               <a:rPr lang="id-ID" smtClean="0"/>
-              <a:t>24/06/2026</a:t>
+              <a:t>13/07/2026</a:t>
             </a:fld>
             <a:endParaRPr lang="id-ID"/>
           </a:p>
@@ -6145,7 +6022,7 @@
           <p:cNvPr id="4" name="Footer Placeholder 3">
             <a:extLst>
               <a:ext uri="{FF2B5EF4-FFF2-40B4-BE49-F238E27FC236}">
-                <a16:creationId xmlns:a16="http://schemas.microsoft.com/office/drawing/2014/main" id="{E2D5F0FF-7272-4F9F-91D8-95EAEB2F4551}"/>
+                <a16:creationId xmlns:a16="http://schemas.microsoft.com/office/drawing/2014/main" id="{46C008C4-E94C-C928-E199-31941D5A48E4}"/>
               </a:ext>
             </a:extLst>
           </p:cNvPr>
@@ -6170,7 +6047,7 @@
           <p:cNvPr id="5" name="Slide Number Placeholder 4">
             <a:extLst>
               <a:ext uri="{FF2B5EF4-FFF2-40B4-BE49-F238E27FC236}">
-                <a16:creationId xmlns:a16="http://schemas.microsoft.com/office/drawing/2014/main" id="{D48CFF7A-FEFA-456E-8EC4-4D5041363E55}"/>
+                <a16:creationId xmlns:a16="http://schemas.microsoft.com/office/drawing/2014/main" id="{52BED59C-6076-EB12-1E8B-7E00454EC04F}"/>
               </a:ext>
             </a:extLst>
           </p:cNvPr>
@@ -6197,7 +6074,7 @@
     </p:spTree>
     <p:extLst>
       <p:ext uri="{BB962C8B-B14F-4D97-AF65-F5344CB8AC3E}">
-        <p14:creationId xmlns:p14="http://schemas.microsoft.com/office/powerpoint/2010/main" val="3667867878"/>
+        <p14:creationId xmlns:p14="http://schemas.microsoft.com/office/powerpoint/2010/main" val="1761710073"/>
       </p:ext>
     </p:extLst>
   </p:cSld>
@@ -6229,7 +6106,7 @@
           <p:cNvPr id="2" name="Date Placeholder 1">
             <a:extLst>
               <a:ext uri="{FF2B5EF4-FFF2-40B4-BE49-F238E27FC236}">
-                <a16:creationId xmlns:a16="http://schemas.microsoft.com/office/drawing/2014/main" id="{94EF5AD9-2E65-4BF0-9061-345F27207716}"/>
+                <a16:creationId xmlns:a16="http://schemas.microsoft.com/office/drawing/2014/main" id="{34257DA9-1F07-060B-4E0C-54E653538E1A}"/>
               </a:ext>
             </a:extLst>
           </p:cNvPr>
@@ -6247,7 +6124,7 @@
           <a:p>
             <a:fld id="{A187CB15-DB72-4ABB-BC39-4D1142C87911}" type="datetimeFigureOut">
               <a:rPr lang="id-ID" smtClean="0"/>
-              <a:t>24/06/2026</a:t>
+              <a:t>13/07/2026</a:t>
             </a:fld>
             <a:endParaRPr lang="id-ID"/>
           </a:p>
@@ -6258,7 +6135,7 @@
           <p:cNvPr id="3" name="Footer Placeholder 2">
             <a:extLst>
               <a:ext uri="{FF2B5EF4-FFF2-40B4-BE49-F238E27FC236}">
-                <a16:creationId xmlns:a16="http://schemas.microsoft.com/office/drawing/2014/main" id="{0BA917CB-9712-4D1A-9749-C469CF9BC174}"/>
+                <a16:creationId xmlns:a16="http://schemas.microsoft.com/office/drawing/2014/main" id="{CE041A37-8663-5C88-71F8-C8C130173F85}"/>
               </a:ext>
             </a:extLst>
           </p:cNvPr>
@@ -6283,7 +6160,7 @@
           <p:cNvPr id="4" name="Slide Number Placeholder 3">
             <a:extLst>
               <a:ext uri="{FF2B5EF4-FFF2-40B4-BE49-F238E27FC236}">
-                <a16:creationId xmlns:a16="http://schemas.microsoft.com/office/drawing/2014/main" id="{F6A3DA11-A202-4DC8-B1BB-1709845BC94D}"/>
+                <a16:creationId xmlns:a16="http://schemas.microsoft.com/office/drawing/2014/main" id="{56782E9F-630D-3499-BB7C-CEC78E6B430F}"/>
               </a:ext>
             </a:extLst>
           </p:cNvPr>
@@ -6310,7 +6187,7 @@
     </p:spTree>
     <p:extLst>
       <p:ext uri="{BB962C8B-B14F-4D97-AF65-F5344CB8AC3E}">
-        <p14:creationId xmlns:p14="http://schemas.microsoft.com/office/powerpoint/2010/main" val="1880691066"/>
+        <p14:creationId xmlns:p14="http://schemas.microsoft.com/office/powerpoint/2010/main" val="2704896032"/>
       </p:ext>
     </p:extLst>
   </p:cSld>
@@ -6342,7 +6219,7 @@
           <p:cNvPr id="2" name="Title 1">
             <a:extLst>
               <a:ext uri="{FF2B5EF4-FFF2-40B4-BE49-F238E27FC236}">
-                <a16:creationId xmlns:a16="http://schemas.microsoft.com/office/drawing/2014/main" id="{86115D24-9AAF-4E98-ADF9-79AA96E2E024}"/>
+                <a16:creationId xmlns:a16="http://schemas.microsoft.com/office/drawing/2014/main" id="{50BABEC7-201D-632E-8DE5-2BCEE0782338}"/>
               </a:ext>
             </a:extLst>
           </p:cNvPr>
@@ -6380,7 +6257,7 @@
           <p:cNvPr id="3" name="Content Placeholder 2">
             <a:extLst>
               <a:ext uri="{FF2B5EF4-FFF2-40B4-BE49-F238E27FC236}">
-                <a16:creationId xmlns:a16="http://schemas.microsoft.com/office/drawing/2014/main" id="{E55C2352-A08B-4797-AB2C-F8C82DC9C548}"/>
+                <a16:creationId xmlns:a16="http://schemas.microsoft.com/office/drawing/2014/main" id="{8C44FD72-E3E0-B931-7CFB-1C8777E6598B}"/>
               </a:ext>
             </a:extLst>
           </p:cNvPr>
@@ -6471,7 +6348,7 @@
           <p:cNvPr id="4" name="Text Placeholder 3">
             <a:extLst>
               <a:ext uri="{FF2B5EF4-FFF2-40B4-BE49-F238E27FC236}">
-                <a16:creationId xmlns:a16="http://schemas.microsoft.com/office/drawing/2014/main" id="{36514321-6882-4AAF-AE5C-D93AD907A1F0}"/>
+                <a16:creationId xmlns:a16="http://schemas.microsoft.com/office/drawing/2014/main" id="{75C40B26-16EF-0155-B10E-BC580BD800E5}"/>
               </a:ext>
             </a:extLst>
           </p:cNvPr>
@@ -6542,7 +6419,7 @@
           <p:cNvPr id="5" name="Date Placeholder 4">
             <a:extLst>
               <a:ext uri="{FF2B5EF4-FFF2-40B4-BE49-F238E27FC236}">
-                <a16:creationId xmlns:a16="http://schemas.microsoft.com/office/drawing/2014/main" id="{55185171-05B5-41AC-93AE-11068205FBFA}"/>
+                <a16:creationId xmlns:a16="http://schemas.microsoft.com/office/drawing/2014/main" id="{42E2F38C-2690-91B3-1FB1-48D245B53DD0}"/>
               </a:ext>
             </a:extLst>
           </p:cNvPr>
@@ -6560,7 +6437,7 @@
           <a:p>
             <a:fld id="{A187CB15-DB72-4ABB-BC39-4D1142C87911}" type="datetimeFigureOut">
               <a:rPr lang="id-ID" smtClean="0"/>
-              <a:t>24/06/2026</a:t>
+              <a:t>13/07/2026</a:t>
             </a:fld>
             <a:endParaRPr lang="id-ID"/>
           </a:p>
@@ -6571,7 +6448,7 @@
           <p:cNvPr id="6" name="Footer Placeholder 5">
             <a:extLst>
               <a:ext uri="{FF2B5EF4-FFF2-40B4-BE49-F238E27FC236}">
-                <a16:creationId xmlns:a16="http://schemas.microsoft.com/office/drawing/2014/main" id="{6E53F0B9-2EFF-4D51-8B9B-BB08790D24AF}"/>
+                <a16:creationId xmlns:a16="http://schemas.microsoft.com/office/drawing/2014/main" id="{FF632B8F-4867-769B-AE27-8CE80F76C454}"/>
               </a:ext>
             </a:extLst>
           </p:cNvPr>
@@ -6596,7 +6473,7 @@
           <p:cNvPr id="7" name="Slide Number Placeholder 6">
             <a:extLst>
               <a:ext uri="{FF2B5EF4-FFF2-40B4-BE49-F238E27FC236}">
-                <a16:creationId xmlns:a16="http://schemas.microsoft.com/office/drawing/2014/main" id="{0DCB2DEB-3F70-4FAF-970B-171B536CB766}"/>
+                <a16:creationId xmlns:a16="http://schemas.microsoft.com/office/drawing/2014/main" id="{EAAFDCDA-4D32-51E1-036D-483E6E495897}"/>
               </a:ext>
             </a:extLst>
           </p:cNvPr>
@@ -6623,7 +6500,7 @@
     </p:spTree>
     <p:extLst>
       <p:ext uri="{BB962C8B-B14F-4D97-AF65-F5344CB8AC3E}">
-        <p14:creationId xmlns:p14="http://schemas.microsoft.com/office/powerpoint/2010/main" val="434579213"/>
+        <p14:creationId xmlns:p14="http://schemas.microsoft.com/office/powerpoint/2010/main" val="69896033"/>
       </p:ext>
     </p:extLst>
   </p:cSld>
@@ -6655,7 +6532,7 @@
           <p:cNvPr id="2" name="Title 1">
             <a:extLst>
               <a:ext uri="{FF2B5EF4-FFF2-40B4-BE49-F238E27FC236}">
-                <a16:creationId xmlns:a16="http://schemas.microsoft.com/office/drawing/2014/main" id="{E7C877D6-EAAE-4689-BC6A-7F8E61CEF1E8}"/>
+                <a16:creationId xmlns:a16="http://schemas.microsoft.com/office/drawing/2014/main" id="{0F0CAD85-6286-B674-4BDE-3EC956AE9918}"/>
               </a:ext>
             </a:extLst>
           </p:cNvPr>
@@ -6693,7 +6570,7 @@
           <p:cNvPr id="3" name="Picture Placeholder 2">
             <a:extLst>
               <a:ext uri="{FF2B5EF4-FFF2-40B4-BE49-F238E27FC236}">
-                <a16:creationId xmlns:a16="http://schemas.microsoft.com/office/drawing/2014/main" id="{1107C76D-3410-4B73-BDC5-386D684763CC}"/>
+                <a16:creationId xmlns:a16="http://schemas.microsoft.com/office/drawing/2014/main" id="{451DD264-FF64-710C-07C7-BB6405F13BE1}"/>
               </a:ext>
             </a:extLst>
           </p:cNvPr>
@@ -6760,7 +6637,7 @@
           <p:cNvPr id="4" name="Text Placeholder 3">
             <a:extLst>
               <a:ext uri="{FF2B5EF4-FFF2-40B4-BE49-F238E27FC236}">
-                <a16:creationId xmlns:a16="http://schemas.microsoft.com/office/drawing/2014/main" id="{56E61E95-D723-4BA4-9A77-F1EF35C09214}"/>
+                <a16:creationId xmlns:a16="http://schemas.microsoft.com/office/drawing/2014/main" id="{5311D816-0725-B761-408A-D6EC3A6837A7}"/>
               </a:ext>
             </a:extLst>
           </p:cNvPr>
@@ -6831,7 +6708,7 @@
           <p:cNvPr id="5" name="Date Placeholder 4">
             <a:extLst>
               <a:ext uri="{FF2B5EF4-FFF2-40B4-BE49-F238E27FC236}">
-                <a16:creationId xmlns:a16="http://schemas.microsoft.com/office/drawing/2014/main" id="{77C5EF0C-8CB9-4C0D-A939-F0E03369949B}"/>
+                <a16:creationId xmlns:a16="http://schemas.microsoft.com/office/drawing/2014/main" id="{91FA1406-E812-C271-85ED-6F0777FDAEEC}"/>
               </a:ext>
             </a:extLst>
           </p:cNvPr>
@@ -6849,7 +6726,7 @@
           <a:p>
             <a:fld id="{A187CB15-DB72-4ABB-BC39-4D1142C87911}" type="datetimeFigureOut">
               <a:rPr lang="id-ID" smtClean="0"/>
-              <a:t>24/06/2026</a:t>
+              <a:t>13/07/2026</a:t>
             </a:fld>
             <a:endParaRPr lang="id-ID"/>
           </a:p>
@@ -6860,7 +6737,7 @@
           <p:cNvPr id="6" name="Footer Placeholder 5">
             <a:extLst>
               <a:ext uri="{FF2B5EF4-FFF2-40B4-BE49-F238E27FC236}">
-                <a16:creationId xmlns:a16="http://schemas.microsoft.com/office/drawing/2014/main" id="{B6054319-39C4-4D4C-84C0-9FF2CA92B406}"/>
+                <a16:creationId xmlns:a16="http://schemas.microsoft.com/office/drawing/2014/main" id="{B178FF31-D078-AF34-420E-7018B4FF9E93}"/>
               </a:ext>
             </a:extLst>
           </p:cNvPr>
@@ -6885,7 +6762,7 @@
           <p:cNvPr id="7" name="Slide Number Placeholder 6">
             <a:extLst>
               <a:ext uri="{FF2B5EF4-FFF2-40B4-BE49-F238E27FC236}">
-                <a16:creationId xmlns:a16="http://schemas.microsoft.com/office/drawing/2014/main" id="{B9372F68-76ED-4EEB-A407-E81A85B682B8}"/>
+                <a16:creationId xmlns:a16="http://schemas.microsoft.com/office/drawing/2014/main" id="{24911E4D-4C4F-EF2E-5476-C81FC7F4CE3F}"/>
               </a:ext>
             </a:extLst>
           </p:cNvPr>
@@ -6912,7 +6789,7 @@
     </p:spTree>
     <p:extLst>
       <p:ext uri="{BB962C8B-B14F-4D97-AF65-F5344CB8AC3E}">
-        <p14:creationId xmlns:p14="http://schemas.microsoft.com/office/powerpoint/2010/main" val="2250883341"/>
+        <p14:creationId xmlns:p14="http://schemas.microsoft.com/office/powerpoint/2010/main" val="1488352154"/>
       </p:ext>
     </p:extLst>
   </p:cSld>
@@ -6949,7 +6826,7 @@
           <p:cNvPr id="2" name="Title Placeholder 1">
             <a:extLst>
               <a:ext uri="{FF2B5EF4-FFF2-40B4-BE49-F238E27FC236}">
-                <a16:creationId xmlns:a16="http://schemas.microsoft.com/office/drawing/2014/main" id="{EE54CBF3-F5D8-46F0-87E0-4ECB5B0C5BBC}"/>
+                <a16:creationId xmlns:a16="http://schemas.microsoft.com/office/drawing/2014/main" id="{BC11801A-A1E2-33C8-CAEF-E16C0F6196C0}"/>
               </a:ext>
             </a:extLst>
           </p:cNvPr>
@@ -6988,7 +6865,7 @@
           <p:cNvPr id="3" name="Text Placeholder 2">
             <a:extLst>
               <a:ext uri="{FF2B5EF4-FFF2-40B4-BE49-F238E27FC236}">
-                <a16:creationId xmlns:a16="http://schemas.microsoft.com/office/drawing/2014/main" id="{9DAE71A4-AB3F-4C60-9F8C-1B417F7E0F49}"/>
+                <a16:creationId xmlns:a16="http://schemas.microsoft.com/office/drawing/2014/main" id="{4D3101B3-2DE2-DB04-BFD3-7BFA688F29AC}"/>
               </a:ext>
             </a:extLst>
           </p:cNvPr>
@@ -7056,7 +6933,7 @@
           <p:cNvPr id="4" name="Date Placeholder 3">
             <a:extLst>
               <a:ext uri="{FF2B5EF4-FFF2-40B4-BE49-F238E27FC236}">
-                <a16:creationId xmlns:a16="http://schemas.microsoft.com/office/drawing/2014/main" id="{8277FAFB-9CBE-40A9-89CA-78C8497158F5}"/>
+                <a16:creationId xmlns:a16="http://schemas.microsoft.com/office/drawing/2014/main" id="{FCA2B856-A08A-81D7-C383-E0C72A53B9F8}"/>
               </a:ext>
             </a:extLst>
           </p:cNvPr>
@@ -7083,7 +6960,7 @@
               <a:defRPr sz="1200">
                 <a:solidFill>
                   <a:schemeClr val="tx1">
-                    <a:tint val="75000"/>
+                    <a:tint val="82000"/>
                   </a:schemeClr>
                 </a:solidFill>
               </a:defRPr>
@@ -7092,7 +6969,7 @@
           <a:p>
             <a:fld id="{A187CB15-DB72-4ABB-BC39-4D1142C87911}" type="datetimeFigureOut">
               <a:rPr lang="id-ID" smtClean="0"/>
-              <a:t>24/06/2026</a:t>
+              <a:t>13/07/2026</a:t>
             </a:fld>
             <a:endParaRPr lang="id-ID"/>
           </a:p>
@@ -7103,7 +6980,7 @@
           <p:cNvPr id="5" name="Footer Placeholder 4">
             <a:extLst>
               <a:ext uri="{FF2B5EF4-FFF2-40B4-BE49-F238E27FC236}">
-                <a16:creationId xmlns:a16="http://schemas.microsoft.com/office/drawing/2014/main" id="{BF6D67C9-B00D-4DB6-9F69-5DF7ED4CA029}"/>
+                <a16:creationId xmlns:a16="http://schemas.microsoft.com/office/drawing/2014/main" id="{8F9D9E5C-85D4-D9AD-73D9-09CC1A635D92}"/>
               </a:ext>
             </a:extLst>
           </p:cNvPr>
@@ -7130,7 +7007,7 @@
               <a:defRPr sz="1200">
                 <a:solidFill>
                   <a:schemeClr val="tx1">
-                    <a:tint val="75000"/>
+                    <a:tint val="82000"/>
                   </a:schemeClr>
                 </a:solidFill>
               </a:defRPr>
@@ -7146,7 +7023,7 @@
           <p:cNvPr id="6" name="Slide Number Placeholder 5">
             <a:extLst>
               <a:ext uri="{FF2B5EF4-FFF2-40B4-BE49-F238E27FC236}">
-                <a16:creationId xmlns:a16="http://schemas.microsoft.com/office/drawing/2014/main" id="{CCA42DCA-A61B-4EB8-8B50-097F067D4046}"/>
+                <a16:creationId xmlns:a16="http://schemas.microsoft.com/office/drawing/2014/main" id="{89E3FDE8-F0D4-C7E3-0848-BD2584F15A5C}"/>
               </a:ext>
             </a:extLst>
           </p:cNvPr>
@@ -7173,7 +7050,7 @@
               <a:defRPr sz="1200">
                 <a:solidFill>
                   <a:schemeClr val="tx1">
-                    <a:tint val="75000"/>
+                    <a:tint val="82000"/>
                   </a:schemeClr>
                 </a:solidFill>
               </a:defRPr>
@@ -7191,23 +7068,23 @@
     </p:spTree>
     <p:extLst>
       <p:ext uri="{BB962C8B-B14F-4D97-AF65-F5344CB8AC3E}">
-        <p14:creationId xmlns:p14="http://schemas.microsoft.com/office/powerpoint/2010/main" val="2238834187"/>
+        <p14:creationId xmlns:p14="http://schemas.microsoft.com/office/powerpoint/2010/main" val="3324774492"/>
       </p:ext>
     </p:extLst>
   </p:cSld>
   <p:clrMap bg1="lt1" tx1="dk1" bg2="lt2" tx2="dk2" accent1="accent1" accent2="accent2" accent3="accent3" accent4="accent4" accent5="accent5" accent6="accent6" hlink="hlink" folHlink="folHlink"/>
   <p:sldLayoutIdLst>
-    <p:sldLayoutId id="2147483649" r:id="rId1"/>
-    <p:sldLayoutId id="2147483650" r:id="rId2"/>
-    <p:sldLayoutId id="2147483651" r:id="rId3"/>
-    <p:sldLayoutId id="2147483652" r:id="rId4"/>
-    <p:sldLayoutId id="2147483653" r:id="rId5"/>
-    <p:sldLayoutId id="2147483654" r:id="rId6"/>
-    <p:sldLayoutId id="2147483655" r:id="rId7"/>
-    <p:sldLayoutId id="2147483656" r:id="rId8"/>
-    <p:sldLayoutId id="2147483657" r:id="rId9"/>
-    <p:sldLayoutId id="2147483658" r:id="rId10"/>
-    <p:sldLayoutId id="2147483659" r:id="rId11"/>
+    <p:sldLayoutId id="2147483661" r:id="rId1"/>
+    <p:sldLayoutId id="2147483662" r:id="rId2"/>
+    <p:sldLayoutId id="2147483663" r:id="rId3"/>
+    <p:sldLayoutId id="2147483664" r:id="rId4"/>
+    <p:sldLayoutId id="2147483665" r:id="rId5"/>
+    <p:sldLayoutId id="2147483666" r:id="rId6"/>
+    <p:sldLayoutId id="2147483667" r:id="rId7"/>
+    <p:sldLayoutId id="2147483668" r:id="rId8"/>
+    <p:sldLayoutId id="2147483669" r:id="rId9"/>
+    <p:sldLayoutId id="2147483670" r:id="rId10"/>
+    <p:sldLayoutId id="2147483671" r:id="rId11"/>
   </p:sldLayoutIdLst>
   <p:txStyles>
     <p:titleStyle>
@@ -7509,47 +7386,12 @@
           <a:chExt cx="0" cy="0"/>
         </a:xfrm>
       </p:grpSpPr>
-      <p:pic>
-        <p:nvPicPr>
-          <p:cNvPr id="12" name="Content Placeholder 11">
-            <a:extLst>
-              <a:ext uri="{FF2B5EF4-FFF2-40B4-BE49-F238E27FC236}">
-                <a16:creationId xmlns:a16="http://schemas.microsoft.com/office/drawing/2014/main" id="{F495EEEA-7A5D-418F-80C9-6E1DF6E20555}"/>
-              </a:ext>
-            </a:extLst>
-          </p:cNvPr>
-          <p:cNvPicPr>
-            <a:picLocks noGrp="1" noChangeAspect="1"/>
-          </p:cNvPicPr>
-          <p:nvPr>
-            <p:ph sz="half" idx="2"/>
-          </p:nvPr>
-        </p:nvPicPr>
-        <p:blipFill>
-          <a:blip r:embed="rId2">
-            <a:extLst>
-              <a:ext uri="{28A0092B-C50C-407E-A947-70E740481C1C}">
-                <a14:useLocalDpi xmlns:a14="http://schemas.microsoft.com/office/drawing/2010/main" val="0"/>
-              </a:ext>
-            </a:extLst>
-          </a:blip>
-          <a:stretch>
-            <a:fillRect/>
-          </a:stretch>
-        </p:blipFill>
-        <p:spPr>
-          <a:xfrm>
-            <a:off x="953900" y="1023353"/>
-            <a:ext cx="4811293" cy="4811293"/>
-          </a:xfrm>
-        </p:spPr>
-      </p:pic>
       <p:sp>
         <p:nvSpPr>
-          <p:cNvPr id="9" name="Text Placeholder 8">
-            <a:extLst>
-              <a:ext uri="{FF2B5EF4-FFF2-40B4-BE49-F238E27FC236}">
-                <a16:creationId xmlns:a16="http://schemas.microsoft.com/office/drawing/2014/main" id="{93C42F9A-C83D-4743-8FE6-2DAB37B2FD1D}"/>
+          <p:cNvPr id="2" name="Title 1">
+            <a:extLst>
+              <a:ext uri="{FF2B5EF4-FFF2-40B4-BE49-F238E27FC236}">
+                <a16:creationId xmlns:a16="http://schemas.microsoft.com/office/drawing/2014/main" id="{CD2AB322-EAE7-623A-11C0-CCF40A2E9631}"/>
               </a:ext>
             </a:extLst>
           </p:cNvPr>
@@ -7557,13 +7399,57 @@
             <a:spLocks noGrp="1"/>
           </p:cNvSpPr>
           <p:nvPr>
-            <p:ph type="body" sz="quarter" idx="3"/>
+            <p:ph type="ctrTitle"/>
           </p:nvPr>
         </p:nvSpPr>
         <p:spPr>
           <a:xfrm>
-            <a:off x="6096000" y="2503113"/>
-            <a:ext cx="5183188" cy="658906"/>
+            <a:off x="4959927" y="2708853"/>
+            <a:ext cx="6022544" cy="720147"/>
+          </a:xfrm>
+        </p:spPr>
+        <p:txBody>
+          <a:bodyPr>
+            <a:normAutofit fontScale="90000"/>
+          </a:bodyPr>
+          <a:lstStyle/>
+          <a:p>
+            <a:r>
+              <a:rPr lang="id-ID" sz="4000" b="1" dirty="0">
+                <a:solidFill>
+                  <a:srgbClr val="002060"/>
+                </a:solidFill>
+              </a:rPr>
+              <a:t>PT MAJU JAYA INDONESIA</a:t>
+            </a:r>
+            <a:endParaRPr lang="id-ID" sz="4000" dirty="0">
+              <a:solidFill>
+                <a:srgbClr val="002060"/>
+              </a:solidFill>
+            </a:endParaRPr>
+          </a:p>
+        </p:txBody>
+      </p:sp>
+      <p:sp>
+        <p:nvSpPr>
+          <p:cNvPr id="9" name="Text Placeholder 8">
+            <a:extLst>
+              <a:ext uri="{FF2B5EF4-FFF2-40B4-BE49-F238E27FC236}">
+                <a16:creationId xmlns:a16="http://schemas.microsoft.com/office/drawing/2014/main" id="{93C42F9A-C83D-4743-8FE6-2DAB37B2FD1D}"/>
+              </a:ext>
+            </a:extLst>
+          </p:cNvPr>
+          <p:cNvSpPr>
+            <a:spLocks noGrp="1"/>
+          </p:cNvSpPr>
+          <p:nvPr>
+            <p:ph type="subTitle" idx="1"/>
+          </p:nvPr>
+        </p:nvSpPr>
+        <p:spPr>
+          <a:xfrm>
+            <a:off x="4959927" y="3429001"/>
+            <a:ext cx="6022544" cy="583274"/>
           </a:xfrm>
         </p:spPr>
         <p:txBody>
@@ -7573,74 +7459,60 @@
           <a:lstStyle/>
           <a:p>
             <a:r>
-              <a:rPr lang="id-ID" sz="3600" b="1" i="0" dirty="0">
+              <a:rPr lang="id-ID" b="1" dirty="0">
                 <a:solidFill>
-                  <a:srgbClr val="212529"/>
+                  <a:schemeClr val="accent4"/>
                 </a:solidFill>
-                <a:effectLst/>
-                <a:latin typeface="Segoe UI" panose="020B0502040204020203" pitchFamily="34" charset="0"/>
               </a:rPr>
-              <a:t>NAMA PERUSAHAAN</a:t>
+              <a:t>Profil Perusahaan 2026</a:t>
             </a:r>
-            <a:endParaRPr lang="id-ID" sz="3600" dirty="0"/>
+            <a:endParaRPr lang="id-ID" sz="3600" dirty="0">
+              <a:solidFill>
+                <a:schemeClr val="accent4"/>
+              </a:solidFill>
+            </a:endParaRPr>
           </a:p>
         </p:txBody>
       </p:sp>
-      <p:sp>
-        <p:nvSpPr>
-          <p:cNvPr id="10" name="Content Placeholder 9">
-            <a:extLst>
-              <a:ext uri="{FF2B5EF4-FFF2-40B4-BE49-F238E27FC236}">
-                <a16:creationId xmlns:a16="http://schemas.microsoft.com/office/drawing/2014/main" id="{1C44031D-46FC-443E-AE20-24D21D00EDCD}"/>
-              </a:ext>
-            </a:extLst>
-          </p:cNvPr>
-          <p:cNvSpPr>
-            <a:spLocks noGrp="1"/>
-          </p:cNvSpPr>
+      <p:pic>
+        <p:nvPicPr>
+          <p:cNvPr id="12" name="Content Placeholder 11">
+            <a:extLst>
+              <a:ext uri="{FF2B5EF4-FFF2-40B4-BE49-F238E27FC236}">
+                <a16:creationId xmlns:a16="http://schemas.microsoft.com/office/drawing/2014/main" id="{F495EEEA-7A5D-418F-80C9-6E1DF6E20555}"/>
+              </a:ext>
+            </a:extLst>
+          </p:cNvPr>
+          <p:cNvPicPr>
+            <a:picLocks noGrp="1" noChangeAspect="1"/>
+          </p:cNvPicPr>
           <p:nvPr>
-            <p:ph sz="quarter" idx="4"/>
+            <p:ph sz="half" idx="4294967295"/>
           </p:nvPr>
-        </p:nvSpPr>
+        </p:nvPicPr>
+        <p:blipFill rotWithShape="1">
+          <a:blip r:embed="rId2">
+            <a:extLst>
+              <a:ext uri="{28A0092B-C50C-407E-A947-70E740481C1C}">
+                <a14:useLocalDpi xmlns:a14="http://schemas.microsoft.com/office/drawing/2010/main" val="0"/>
+              </a:ext>
+            </a:extLst>
+          </a:blip>
+          <a:srcRect l="11028" t="15292" r="11028" b="15292"/>
+          <a:stretch>
+            <a:fillRect/>
+          </a:stretch>
+        </p:blipFill>
         <p:spPr>
           <a:xfrm>
-            <a:off x="6096000" y="3162019"/>
-            <a:ext cx="5183188" cy="533960"/>
+            <a:off x="1209529" y="1759527"/>
+            <a:ext cx="3750398" cy="3338946"/>
           </a:xfrm>
+          <a:prstGeom prst="rect">
+            <a:avLst/>
+          </a:prstGeom>
         </p:spPr>
-        <p:txBody>
-          <a:bodyPr>
-            <a:normAutofit/>
-          </a:bodyPr>
-          <a:lstStyle/>
-          <a:p>
-            <a:pPr marL="0" indent="0">
-              <a:buNone/>
-            </a:pPr>
-            <a:r>
-              <a:rPr lang="id-ID" sz="2400" b="0" i="0" dirty="0">
-                <a:solidFill>
-                  <a:srgbClr val="212529"/>
-                </a:solidFill>
-                <a:effectLst/>
-                <a:latin typeface="Segoe UI" panose="020B0502040204020203" pitchFamily="34" charset="0"/>
-              </a:rPr>
-              <a:t>Profil Perusahaan 202</a:t>
-            </a:r>
-            <a:r>
-              <a:rPr lang="en-US" sz="2400" b="0" i="0" dirty="0">
-                <a:solidFill>
-                  <a:srgbClr val="212529"/>
-                </a:solidFill>
-                <a:effectLst/>
-                <a:latin typeface="Segoe UI" panose="020B0502040204020203" pitchFamily="34" charset="0"/>
-              </a:rPr>
-              <a:t>6</a:t>
-            </a:r>
-            <a:endParaRPr lang="id-ID" sz="2400" dirty="0"/>
-          </a:p>
-        </p:txBody>
-      </p:sp>
+      </p:pic>
     </p:spTree>
     <p:extLst>
       <p:ext uri="{BB962C8B-B14F-4D97-AF65-F5344CB8AC3E}">
@@ -7687,19 +7559,16 @@
             <p:ph type="title"/>
           </p:nvPr>
         </p:nvSpPr>
-        <p:spPr>
-          <a:xfrm>
-            <a:off x="838200" y="365126"/>
-            <a:ext cx="10515600" cy="734966"/>
-          </a:xfrm>
-        </p:spPr>
+        <p:spPr/>
         <p:txBody>
-          <a:bodyPr/>
+          <a:bodyPr>
+            <a:normAutofit/>
+          </a:bodyPr>
           <a:lstStyle/>
           <a:p>
             <a:pPr algn="ctr"/>
             <a:r>
-              <a:rPr lang="id-ID" b="1" dirty="0">
+              <a:rPr lang="id-ID" sz="3600" b="1" dirty="0">
                 <a:solidFill>
                   <a:srgbClr val="002060"/>
                 </a:solidFill>
@@ -7722,26 +7591,26 @@
             <a:spLocks noGrp="1"/>
           </p:cNvSpPr>
           <p:nvPr>
-            <p:ph idx="1"/>
+            <p:ph idx="4294967295"/>
           </p:nvPr>
         </p:nvSpPr>
         <p:spPr>
           <a:xfrm>
-            <a:off x="838200" y="2693988"/>
-            <a:ext cx="10515600" cy="957916"/>
+            <a:off x="2272145" y="1580869"/>
+            <a:ext cx="7620382" cy="957262"/>
           </a:xfrm>
         </p:spPr>
         <p:txBody>
           <a:bodyPr>
-            <a:normAutofit lnSpcReduction="10000"/>
+            <a:normAutofit fontScale="92500" lnSpcReduction="20000"/>
           </a:bodyPr>
           <a:lstStyle/>
           <a:p>
-            <a:pPr marL="0" indent="0">
+            <a:pPr marL="0" indent="0" algn="ctr">
               <a:buNone/>
             </a:pPr>
             <a:r>
-              <a:rPr lang="en-US" sz="2000" b="1" dirty="0">
+              <a:rPr lang="en-US" sz="3000" b="1" dirty="0">
                 <a:solidFill>
                   <a:srgbClr val="7030A0"/>
                 </a:solidFill>
@@ -7755,11 +7624,11 @@
             </a:endParaRPr>
           </a:p>
           <a:p>
-            <a:pPr marL="0" indent="0">
+            <a:pPr marL="0" indent="0" algn="ctr">
               <a:buNone/>
             </a:pPr>
             <a:r>
-              <a:rPr lang="id-ID" sz="2000" dirty="0">
+              <a:rPr lang="id-ID" sz="1900" i="1" dirty="0">
                 <a:solidFill>
                   <a:srgbClr val="7030A0"/>
                 </a:solidFill>
@@ -7771,10 +7640,10 @@
       </p:sp>
       <p:pic>
         <p:nvPicPr>
-          <p:cNvPr id="5" name="Graphic 4" descr="Bullseye with solid fill">
-            <a:extLst>
-              <a:ext uri="{FF2B5EF4-FFF2-40B4-BE49-F238E27FC236}">
-                <a16:creationId xmlns:a16="http://schemas.microsoft.com/office/drawing/2014/main" id="{1B12DF1F-56ED-401D-BA88-3A237FECA43B}"/>
+          <p:cNvPr id="6" name="Graphic 5" descr="Wheelchair with solid fill">
+            <a:extLst>
+              <a:ext uri="{FF2B5EF4-FFF2-40B4-BE49-F238E27FC236}">
+                <a16:creationId xmlns:a16="http://schemas.microsoft.com/office/drawing/2014/main" id="{B7C862D0-FA2F-67D6-4FB2-B24CC5BC36CF}"/>
               </a:ext>
             </a:extLst>
           </p:cNvPr>
@@ -7784,13 +7653,10 @@
           <p:nvPr/>
         </p:nvPicPr>
         <p:blipFill>
-          <a:blip r:embed="rId2">
-            <a:extLst>
-              <a:ext uri="{28A0092B-C50C-407E-A947-70E740481C1C}">
-                <a14:useLocalDpi xmlns:a14="http://schemas.microsoft.com/office/drawing/2010/main" val="0"/>
-              </a:ext>
+          <a:blip>
+            <a:extLst>
               <a:ext uri="{96DAC541-7B7A-43D3-8B79-37D633B846F1}">
-                <asvg:svgBlip xmlns:asvg="http://schemas.microsoft.com/office/drawing/2016/SVG/main" r:embed="rId3"/>
+                <asvg:svgBlip xmlns:asvg="http://schemas.microsoft.com/office/drawing/2016/SVG/main" r:embed="rId2"/>
               </a:ext>
             </a:extLst>
           </a:blip>
@@ -7800,8 +7666,8 @@
         </p:blipFill>
         <p:spPr>
           <a:xfrm>
-            <a:off x="4240306" y="1435099"/>
-            <a:ext cx="914400" cy="914400"/>
+            <a:off x="3115085" y="3018502"/>
+            <a:ext cx="660556" cy="660556"/>
           </a:xfrm>
           <a:prstGeom prst="rect">
             <a:avLst/>
@@ -7810,10 +7676,10 @@
       </p:pic>
       <p:pic>
         <p:nvPicPr>
-          <p:cNvPr id="7" name="Graphic 6" descr="Star with solid fill">
-            <a:extLst>
-              <a:ext uri="{FF2B5EF4-FFF2-40B4-BE49-F238E27FC236}">
-                <a16:creationId xmlns:a16="http://schemas.microsoft.com/office/drawing/2014/main" id="{DA68C3A9-0235-457D-8696-93A83634E780}"/>
+          <p:cNvPr id="11" name="Graphic 10" descr="Lightbulb and gear with solid fill">
+            <a:extLst>
+              <a:ext uri="{FF2B5EF4-FFF2-40B4-BE49-F238E27FC236}">
+                <a16:creationId xmlns:a16="http://schemas.microsoft.com/office/drawing/2014/main" id="{E0087868-1621-8242-69FA-7DADCD49D38D}"/>
               </a:ext>
             </a:extLst>
           </p:cNvPr>
@@ -7823,13 +7689,10 @@
           <p:nvPr/>
         </p:nvPicPr>
         <p:blipFill>
-          <a:blip r:embed="rId4">
-            <a:extLst>
-              <a:ext uri="{28A0092B-C50C-407E-A947-70E740481C1C}">
-                <a14:useLocalDpi xmlns:a14="http://schemas.microsoft.com/office/drawing/2010/main" val="0"/>
-              </a:ext>
+          <a:blip>
+            <a:extLst>
               <a:ext uri="{96DAC541-7B7A-43D3-8B79-37D633B846F1}">
-                <asvg:svgBlip xmlns:asvg="http://schemas.microsoft.com/office/drawing/2016/SVG/main" r:embed="rId5"/>
+                <asvg:svgBlip xmlns:asvg="http://schemas.microsoft.com/office/drawing/2016/SVG/main" r:embed="rId3"/>
               </a:ext>
             </a:extLst>
           </a:blip>
@@ -7839,8 +7702,8 @@
         </p:blipFill>
         <p:spPr>
           <a:xfrm>
-            <a:off x="5638800" y="1435099"/>
-            <a:ext cx="914400" cy="914400"/>
+            <a:off x="3115085" y="3659094"/>
+            <a:ext cx="660556" cy="660556"/>
           </a:xfrm>
           <a:prstGeom prst="rect">
             <a:avLst/>
@@ -7849,10 +7712,10 @@
       </p:pic>
       <p:pic>
         <p:nvPicPr>
-          <p:cNvPr id="9" name="Graphic 8" descr="Upward trend with solid fill">
-            <a:extLst>
-              <a:ext uri="{FF2B5EF4-FFF2-40B4-BE49-F238E27FC236}">
-                <a16:creationId xmlns:a16="http://schemas.microsoft.com/office/drawing/2014/main" id="{81C609A6-0427-43E4-A566-464A00A2E7DF}"/>
+          <p:cNvPr id="13" name="Graphic 12" descr="Open hand with plant with solid fill">
+            <a:extLst>
+              <a:ext uri="{FF2B5EF4-FFF2-40B4-BE49-F238E27FC236}">
+                <a16:creationId xmlns:a16="http://schemas.microsoft.com/office/drawing/2014/main" id="{D9B3BCEB-B846-BCF0-25FE-849D6A852F64}"/>
               </a:ext>
             </a:extLst>
           </p:cNvPr>
@@ -7862,13 +7725,10 @@
           <p:nvPr/>
         </p:nvPicPr>
         <p:blipFill>
-          <a:blip r:embed="rId6">
-            <a:extLst>
-              <a:ext uri="{28A0092B-C50C-407E-A947-70E740481C1C}">
-                <a14:useLocalDpi xmlns:a14="http://schemas.microsoft.com/office/drawing/2010/main" val="0"/>
-              </a:ext>
+          <a:blip>
+            <a:extLst>
               <a:ext uri="{96DAC541-7B7A-43D3-8B79-37D633B846F1}">
-                <asvg:svgBlip xmlns:asvg="http://schemas.microsoft.com/office/drawing/2016/SVG/main" r:embed="rId7"/>
+                <asvg:svgBlip xmlns:asvg="http://schemas.microsoft.com/office/drawing/2016/SVG/main" r:embed="rId4"/>
               </a:ext>
             </a:extLst>
           </a:blip>
@@ -7878,8 +7738,80 @@
         </p:blipFill>
         <p:spPr>
           <a:xfrm>
-            <a:off x="7037294" y="1421652"/>
-            <a:ext cx="914400" cy="914400"/>
+            <a:off x="3115085" y="4299686"/>
+            <a:ext cx="660556" cy="660556"/>
+          </a:xfrm>
+          <a:prstGeom prst="rect">
+            <a:avLst/>
+          </a:prstGeom>
+        </p:spPr>
+      </p:pic>
+      <p:pic>
+        <p:nvPicPr>
+          <p:cNvPr id="15" name="Graphic 14" descr="Bullseye with solid fill">
+            <a:extLst>
+              <a:ext uri="{FF2B5EF4-FFF2-40B4-BE49-F238E27FC236}">
+                <a16:creationId xmlns:a16="http://schemas.microsoft.com/office/drawing/2014/main" id="{6A4B4432-B550-AD47-D1B2-EB327F157BFC}"/>
+              </a:ext>
+            </a:extLst>
+          </p:cNvPr>
+          <p:cNvPicPr>
+            <a:picLocks noChangeAspect="1"/>
+          </p:cNvPicPr>
+          <p:nvPr/>
+        </p:nvPicPr>
+        <p:blipFill>
+          <a:blip>
+            <a:extLst>
+              <a:ext uri="{96DAC541-7B7A-43D3-8B79-37D633B846F1}">
+                <asvg:svgBlip xmlns:asvg="http://schemas.microsoft.com/office/drawing/2016/SVG/main" r:embed="rId5"/>
+              </a:ext>
+            </a:extLst>
+          </a:blip>
+          <a:stretch>
+            <a:fillRect/>
+          </a:stretch>
+        </p:blipFill>
+        <p:spPr>
+          <a:xfrm>
+            <a:off x="3115085" y="4940278"/>
+            <a:ext cx="660556" cy="660556"/>
+          </a:xfrm>
+          <a:prstGeom prst="rect">
+            <a:avLst/>
+          </a:prstGeom>
+        </p:spPr>
+      </p:pic>
+      <p:pic>
+        <p:nvPicPr>
+          <p:cNvPr id="17" name="Graphic 16" descr="Business Growth with solid fill">
+            <a:extLst>
+              <a:ext uri="{FF2B5EF4-FFF2-40B4-BE49-F238E27FC236}">
+                <a16:creationId xmlns:a16="http://schemas.microsoft.com/office/drawing/2014/main" id="{22D1A8FB-2F62-121D-33FA-32544A112557}"/>
+              </a:ext>
+            </a:extLst>
+          </p:cNvPr>
+          <p:cNvPicPr>
+            <a:picLocks noChangeAspect="1"/>
+          </p:cNvPicPr>
+          <p:nvPr/>
+        </p:nvPicPr>
+        <p:blipFill>
+          <a:blip>
+            <a:extLst>
+              <a:ext uri="{96DAC541-7B7A-43D3-8B79-37D633B846F1}">
+                <asvg:svgBlip xmlns:asvg="http://schemas.microsoft.com/office/drawing/2016/SVG/main" r:embed="rId6"/>
+              </a:ext>
+            </a:extLst>
+          </a:blip>
+          <a:stretch>
+            <a:fillRect/>
+          </a:stretch>
+        </p:blipFill>
+        <p:spPr>
+          <a:xfrm>
+            <a:off x="3115085" y="5580870"/>
+            <a:ext cx="660556" cy="660556"/>
           </a:xfrm>
           <a:prstGeom prst="rect">
             <a:avLst/>
@@ -7888,10 +7820,10 @@
       </p:pic>
       <p:sp>
         <p:nvSpPr>
-          <p:cNvPr id="10" name="TextBox 9">
-            <a:extLst>
-              <a:ext uri="{FF2B5EF4-FFF2-40B4-BE49-F238E27FC236}">
-                <a16:creationId xmlns:a16="http://schemas.microsoft.com/office/drawing/2014/main" id="{FA05600B-B194-4B1A-A488-BC17448898FD}"/>
+          <p:cNvPr id="18" name="TextBox 17">
+            <a:extLst>
+              <a:ext uri="{FF2B5EF4-FFF2-40B4-BE49-F238E27FC236}">
+                <a16:creationId xmlns:a16="http://schemas.microsoft.com/office/drawing/2014/main" id="{BA40457E-9C97-1EFE-CAE7-8AD87429F7E3}"/>
               </a:ext>
             </a:extLst>
           </p:cNvPr>
@@ -7900,8 +7832,216 @@
         </p:nvSpPr>
         <p:spPr>
           <a:xfrm>
-            <a:off x="838200" y="4003583"/>
-            <a:ext cx="10515600" cy="1754326"/>
+            <a:off x="4018547" y="3163727"/>
+            <a:ext cx="4933274" cy="369332"/>
+          </a:xfrm>
+          <a:prstGeom prst="rect">
+            <a:avLst/>
+          </a:prstGeom>
+          <a:noFill/>
+        </p:spPr>
+        <p:txBody>
+          <a:bodyPr wrap="none" rtlCol="0">
+            <a:spAutoFit/>
+          </a:bodyPr>
+          <a:lstStyle/>
+          <a:p>
+            <a:r>
+              <a:rPr lang="id-ID" dirty="0">
+                <a:solidFill>
+                  <a:srgbClr val="002060"/>
+                </a:solidFill>
+              </a:rPr>
+              <a:t>Belajar dan meningkatkan kemampuan setiap hari</a:t>
+            </a:r>
+            <a:r>
+              <a:rPr lang="en-US" dirty="0">
+                <a:solidFill>
+                  <a:srgbClr val="002060"/>
+                </a:solidFill>
+              </a:rPr>
+              <a:t>.</a:t>
+            </a:r>
+            <a:endParaRPr lang="id-ID" dirty="0">
+              <a:solidFill>
+                <a:srgbClr val="002060"/>
+              </a:solidFill>
+            </a:endParaRPr>
+          </a:p>
+        </p:txBody>
+      </p:sp>
+      <p:sp>
+        <p:nvSpPr>
+          <p:cNvPr id="19" name="TextBox 18">
+            <a:extLst>
+              <a:ext uri="{FF2B5EF4-FFF2-40B4-BE49-F238E27FC236}">
+                <a16:creationId xmlns:a16="http://schemas.microsoft.com/office/drawing/2014/main" id="{797787EF-2F89-BE67-F1B7-BA4423E14CAE}"/>
+              </a:ext>
+            </a:extLst>
+          </p:cNvPr>
+          <p:cNvSpPr txBox="1"/>
+          <p:nvPr/>
+        </p:nvSpPr>
+        <p:spPr>
+          <a:xfrm>
+            <a:off x="4018547" y="3804706"/>
+            <a:ext cx="5094151" cy="369332"/>
+          </a:xfrm>
+          <a:prstGeom prst="rect">
+            <a:avLst/>
+          </a:prstGeom>
+          <a:noFill/>
+        </p:spPr>
+        <p:txBody>
+          <a:bodyPr wrap="none" rtlCol="0">
+            <a:spAutoFit/>
+          </a:bodyPr>
+          <a:lstStyle/>
+          <a:p>
+            <a:r>
+              <a:rPr lang="id-ID" dirty="0">
+                <a:solidFill>
+                  <a:srgbClr val="002060"/>
+                </a:solidFill>
+              </a:rPr>
+              <a:t>Mengembangkan kreativitas dalam berbagai bidang.</a:t>
+            </a:r>
+          </a:p>
+        </p:txBody>
+      </p:sp>
+      <p:sp>
+        <p:nvSpPr>
+          <p:cNvPr id="20" name="TextBox 19">
+            <a:extLst>
+              <a:ext uri="{FF2B5EF4-FFF2-40B4-BE49-F238E27FC236}">
+                <a16:creationId xmlns:a16="http://schemas.microsoft.com/office/drawing/2014/main" id="{342498CD-5A5B-3365-BBE6-FE0A402B5D75}"/>
+              </a:ext>
+            </a:extLst>
+          </p:cNvPr>
+          <p:cNvSpPr txBox="1"/>
+          <p:nvPr/>
+        </p:nvSpPr>
+        <p:spPr>
+          <a:xfrm>
+            <a:off x="4018547" y="4445298"/>
+            <a:ext cx="5398529" cy="369332"/>
+          </a:xfrm>
+          <a:prstGeom prst="rect">
+            <a:avLst/>
+          </a:prstGeom>
+          <a:noFill/>
+        </p:spPr>
+        <p:txBody>
+          <a:bodyPr wrap="none" rtlCol="0">
+            <a:spAutoFit/>
+          </a:bodyPr>
+          <a:lstStyle/>
+          <a:p>
+            <a:r>
+              <a:rPr lang="id-ID" dirty="0">
+                <a:solidFill>
+                  <a:srgbClr val="002060"/>
+                </a:solidFill>
+              </a:rPr>
+              <a:t>Menjalin hubungan baik dengan teman dan lingkungan.</a:t>
+            </a:r>
+          </a:p>
+        </p:txBody>
+      </p:sp>
+      <p:sp>
+        <p:nvSpPr>
+          <p:cNvPr id="21" name="TextBox 20">
+            <a:extLst>
+              <a:ext uri="{FF2B5EF4-FFF2-40B4-BE49-F238E27FC236}">
+                <a16:creationId xmlns:a16="http://schemas.microsoft.com/office/drawing/2014/main" id="{09C89640-51E3-D715-D51D-097A8F701CD7}"/>
+              </a:ext>
+            </a:extLst>
+          </p:cNvPr>
+          <p:cNvSpPr txBox="1"/>
+          <p:nvPr/>
+        </p:nvSpPr>
+        <p:spPr>
+          <a:xfrm>
+            <a:off x="4018547" y="5085890"/>
+            <a:ext cx="5873980" cy="369332"/>
+          </a:xfrm>
+          <a:prstGeom prst="rect">
+            <a:avLst/>
+          </a:prstGeom>
+          <a:noFill/>
+        </p:spPr>
+        <p:txBody>
+          <a:bodyPr wrap="none" rtlCol="0">
+            <a:spAutoFit/>
+          </a:bodyPr>
+          <a:lstStyle/>
+          <a:p>
+            <a:r>
+              <a:rPr lang="id-ID" dirty="0">
+                <a:solidFill>
+                  <a:srgbClr val="002060"/>
+                </a:solidFill>
+              </a:rPr>
+              <a:t>Berusaha mencapai target akademik maupun non-akademik.</a:t>
+            </a:r>
+          </a:p>
+        </p:txBody>
+      </p:sp>
+      <p:sp>
+        <p:nvSpPr>
+          <p:cNvPr id="22" name="TextBox 21">
+            <a:extLst>
+              <a:ext uri="{FF2B5EF4-FFF2-40B4-BE49-F238E27FC236}">
+                <a16:creationId xmlns:a16="http://schemas.microsoft.com/office/drawing/2014/main" id="{BF1CFAA3-DBD3-E742-8634-25D748362A4B}"/>
+              </a:ext>
+            </a:extLst>
+          </p:cNvPr>
+          <p:cNvSpPr txBox="1"/>
+          <p:nvPr/>
+        </p:nvSpPr>
+        <p:spPr>
+          <a:xfrm>
+            <a:off x="4018547" y="5726482"/>
+            <a:ext cx="5792483" cy="369332"/>
+          </a:xfrm>
+          <a:prstGeom prst="rect">
+            <a:avLst/>
+          </a:prstGeom>
+          <a:noFill/>
+        </p:spPr>
+        <p:txBody>
+          <a:bodyPr wrap="none" rtlCol="0">
+            <a:spAutoFit/>
+          </a:bodyPr>
+          <a:lstStyle/>
+          <a:p>
+            <a:r>
+              <a:rPr lang="id-ID" dirty="0">
+                <a:solidFill>
+                  <a:srgbClr val="002060"/>
+                </a:solidFill>
+              </a:rPr>
+              <a:t>Menjadi pribadi yang disiplin, bertanggung jawab, dan jujur.</a:t>
+            </a:r>
+          </a:p>
+        </p:txBody>
+      </p:sp>
+      <p:sp>
+        <p:nvSpPr>
+          <p:cNvPr id="27" name="TextBox 26">
+            <a:extLst>
+              <a:ext uri="{FF2B5EF4-FFF2-40B4-BE49-F238E27FC236}">
+                <a16:creationId xmlns:a16="http://schemas.microsoft.com/office/drawing/2014/main" id="{97B65A34-5837-BD07-F712-A96C71F23B42}"/>
+              </a:ext>
+            </a:extLst>
+          </p:cNvPr>
+          <p:cNvSpPr txBox="1"/>
+          <p:nvPr/>
+        </p:nvSpPr>
+        <p:spPr>
+          <a:xfrm>
+            <a:off x="838200" y="2594474"/>
+            <a:ext cx="10515600" cy="492443"/>
           </a:xfrm>
           <a:prstGeom prst="rect">
             <a:avLst/>
@@ -7914,104 +8054,20 @@
           </a:bodyPr>
           <a:lstStyle/>
           <a:p>
+            <a:pPr algn="ctr"/>
             <a:r>
-              <a:rPr lang="id-ID" b="1" dirty="0">
+              <a:rPr lang="en-US" sz="2600" b="1" dirty="0">
                 <a:solidFill>
                   <a:srgbClr val="7030A0"/>
                 </a:solidFill>
               </a:rPr>
               <a:t>MISI</a:t>
             </a:r>
-            <a:endParaRPr lang="en-US" b="1" dirty="0">
+            <a:endParaRPr lang="id-ID" sz="2600" b="1" dirty="0">
               <a:solidFill>
                 <a:srgbClr val="7030A0"/>
               </a:solidFill>
             </a:endParaRPr>
-          </a:p>
-          <a:p>
-            <a:pPr marL="285750" indent="-285750">
-              <a:buFont typeface="Arial" panose="020B0604020202020204" pitchFamily="34" charset="0"/>
-              <a:buChar char="•"/>
-            </a:pPr>
-            <a:r>
-              <a:rPr lang="fi-FI" dirty="0">
-                <a:solidFill>
-                  <a:srgbClr val="7030A0"/>
-                </a:solidFill>
-              </a:rPr>
-              <a:t>Belajar dan meningkatkan kemampuan setiap hari</a:t>
-            </a:r>
-          </a:p>
-          <a:p>
-            <a:pPr marL="285750" indent="-285750">
-              <a:buFont typeface="Arial" panose="020B0604020202020204" pitchFamily="34" charset="0"/>
-              <a:buChar char="•"/>
-            </a:pPr>
-            <a:r>
-              <a:rPr lang="id-ID" dirty="0">
-                <a:solidFill>
-                  <a:srgbClr val="7030A0"/>
-                </a:solidFill>
-              </a:rPr>
-              <a:t>Mengembangkan kreativitas dalam berbagai bidang.</a:t>
-            </a:r>
-            <a:endParaRPr lang="fi-FI" dirty="0">
-              <a:solidFill>
-                <a:srgbClr val="7030A0"/>
-              </a:solidFill>
-            </a:endParaRPr>
-          </a:p>
-          <a:p>
-            <a:pPr marL="285750" indent="-285750">
-              <a:buFont typeface="Arial" panose="020B0604020202020204" pitchFamily="34" charset="0"/>
-              <a:buChar char="•"/>
-            </a:pPr>
-            <a:r>
-              <a:rPr lang="sv-SE" dirty="0">
-                <a:solidFill>
-                  <a:srgbClr val="7030A0"/>
-                </a:solidFill>
-              </a:rPr>
-              <a:t>Menjalin hubungan baik dengan teman dan lingkungan.</a:t>
-            </a:r>
-            <a:endParaRPr lang="fi-FI" dirty="0">
-              <a:solidFill>
-                <a:srgbClr val="7030A0"/>
-              </a:solidFill>
-            </a:endParaRPr>
-          </a:p>
-          <a:p>
-            <a:pPr marL="285750" indent="-285750">
-              <a:buFont typeface="Arial" panose="020B0604020202020204" pitchFamily="34" charset="0"/>
-              <a:buChar char="•"/>
-            </a:pPr>
-            <a:r>
-              <a:rPr lang="sv-SE" dirty="0">
-                <a:solidFill>
-                  <a:srgbClr val="7030A0"/>
-                </a:solidFill>
-              </a:rPr>
-              <a:t>Berusaha mencapai target akademik maupun non-akademik.</a:t>
-            </a:r>
-            <a:endParaRPr lang="fi-FI" dirty="0">
-              <a:solidFill>
-                <a:srgbClr val="7030A0"/>
-              </a:solidFill>
-            </a:endParaRPr>
-          </a:p>
-          <a:p>
-            <a:pPr marL="285750" indent="-285750">
-              <a:buFont typeface="Arial" panose="020B0604020202020204" pitchFamily="34" charset="0"/>
-              <a:buChar char="•"/>
-            </a:pPr>
-            <a:r>
-              <a:rPr lang="id-ID" dirty="0">
-                <a:solidFill>
-                  <a:srgbClr val="7030A0"/>
-                </a:solidFill>
-              </a:rPr>
-              <a:t>Menjadi pribadi yang disiplin, bertanggung jawab, dan jujur.</a:t>
-            </a:r>
           </a:p>
         </p:txBody>
       </p:sp>
@@ -8063,21 +8119,22 @@
         </p:nvSpPr>
         <p:spPr/>
         <p:txBody>
-          <a:bodyPr/>
+          <a:bodyPr>
+            <a:normAutofit/>
+          </a:bodyPr>
           <a:lstStyle/>
           <a:p>
             <a:pPr algn="ctr"/>
             <a:r>
-              <a:rPr lang="id-ID" b="1" i="0" dirty="0">
+              <a:rPr lang="id-ID" sz="3600" b="1" i="0" dirty="0">
                 <a:solidFill>
                   <a:srgbClr val="002060"/>
                 </a:solidFill>
                 <a:effectLst/>
-                <a:latin typeface="Segoe UI" panose="020B0502040204020203" pitchFamily="34" charset="0"/>
               </a:rPr>
               <a:t>STRUKTUR ORGANISASI</a:t>
             </a:r>
-            <a:endParaRPr lang="id-ID" dirty="0">
+            <a:endParaRPr lang="id-ID" sz="3600" dirty="0">
               <a:solidFill>
                 <a:srgbClr val="002060"/>
               </a:solidFill>
@@ -8098,7 +8155,7 @@
           <p:nvPr>
             <p:extLst>
               <p:ext uri="{D42A27DB-BD31-4B8C-83A1-F6EECF244321}">
-                <p14:modId xmlns:p14="http://schemas.microsoft.com/office/powerpoint/2010/main" val="3556718788"/>
+                <p14:modId xmlns:p14="http://schemas.microsoft.com/office/powerpoint/2010/main" val="1972338998"/>
               </p:ext>
             </p:extLst>
           </p:nvPr>
@@ -8161,21 +8218,32 @@
         </p:nvSpPr>
         <p:spPr/>
         <p:txBody>
-          <a:bodyPr/>
+          <a:bodyPr>
+            <a:normAutofit/>
+          </a:bodyPr>
           <a:lstStyle/>
           <a:p>
             <a:pPr algn="ctr"/>
             <a:r>
-              <a:rPr lang="id-ID" b="1" i="0" dirty="0">
+              <a:rPr lang="id-ID" sz="3600" b="1" i="0" dirty="0">
+                <a:solidFill>
+                  <a:srgbClr val="002060"/>
+                </a:solidFill>
+                <a:effectLst/>
+              </a:rPr>
+              <a:t>PRODUK</a:t>
+            </a:r>
+            <a:r>
+              <a:rPr lang="id-ID" sz="3600" b="1" i="0" dirty="0">
                 <a:solidFill>
                   <a:srgbClr val="002060"/>
                 </a:solidFill>
                 <a:effectLst/>
                 <a:latin typeface="Segoe UI" panose="020B0502040204020203" pitchFamily="34" charset="0"/>
               </a:rPr>
-              <a:t>PRODUK &amp; LAYANAN</a:t>
+              <a:t> &amp; LAYANAN</a:t>
             </a:r>
-            <a:endParaRPr lang="id-ID" dirty="0">
+            <a:endParaRPr lang="id-ID" sz="3600" dirty="0">
               <a:solidFill>
                 <a:srgbClr val="002060"/>
               </a:solidFill>
@@ -8225,10 +8293,7 @@
           <a:lstStyle/>
           <a:p>
             <a:pPr algn="ctr"/>
-            <a:r>
-              <a:rPr lang="id-ID" sz="2000" b="1" dirty="0"/>
-              <a:t>Laptop</a:t>
-            </a:r>
+            <a:endParaRPr lang="id-ID" sz="2000" b="1" dirty="0"/>
           </a:p>
         </p:txBody>
       </p:sp>
@@ -8274,10 +8339,7 @@
           <a:lstStyle/>
           <a:p>
             <a:pPr algn="ctr"/>
-            <a:r>
-              <a:rPr lang="id-ID" sz="2000" b="1" dirty="0"/>
-              <a:t>Smartphone</a:t>
-            </a:r>
+            <a:endParaRPr lang="id-ID" sz="2000" b="1" dirty="0"/>
           </a:p>
         </p:txBody>
       </p:sp>
@@ -8323,10 +8385,7 @@
           <a:lstStyle/>
           <a:p>
             <a:pPr algn="r"/>
-            <a:r>
-              <a:rPr lang="id-ID" sz="2000" b="1" dirty="0"/>
-              <a:t>Servis Komputer</a:t>
-            </a:r>
+            <a:endParaRPr lang="id-ID" sz="2000" b="1" dirty="0"/>
           </a:p>
         </p:txBody>
       </p:sp>
@@ -8371,17 +8430,7 @@
           <a:bodyPr lIns="1440000" rIns="0" rtlCol="0" anchor="ctr"/>
           <a:lstStyle/>
           <a:p>
-            <a:r>
-              <a:rPr lang="id-ID" sz="2000" b="1" dirty="0"/>
-              <a:t>Pelatihan</a:t>
-            </a:r>
-            <a:endParaRPr lang="en-US" sz="2000" b="1" dirty="0"/>
-          </a:p>
-          <a:p>
-            <a:r>
-              <a:rPr lang="id-ID" sz="2000" b="1" dirty="0"/>
-              <a:t>Komputer</a:t>
-            </a:r>
+            <a:endParaRPr lang="id-ID" sz="2000" b="1" dirty="0"/>
           </a:p>
         </p:txBody>
       </p:sp>
@@ -8400,13 +8449,13 @@
           <p:nvPr/>
         </p:nvPicPr>
         <p:blipFill>
-          <a:blip r:embed="rId2">
+          <a:blip>
             <a:extLst>
               <a:ext uri="{28A0092B-C50C-407E-A947-70E740481C1C}">
                 <a14:useLocalDpi xmlns:a14="http://schemas.microsoft.com/office/drawing/2010/main" val="0"/>
               </a:ext>
               <a:ext uri="{96DAC541-7B7A-43D3-8B79-37D633B846F1}">
-                <asvg:svgBlip xmlns:asvg="http://schemas.microsoft.com/office/drawing/2016/SVG/main" r:embed="rId3"/>
+                <asvg:svgBlip xmlns:asvg="http://schemas.microsoft.com/office/drawing/2016/SVG/main" r:embed="rId2"/>
               </a:ext>
             </a:extLst>
           </a:blip>
@@ -8416,7 +8465,7 @@
         </p:blipFill>
         <p:spPr>
           <a:xfrm>
-            <a:off x="2886635" y="2400300"/>
+            <a:off x="3177988" y="2444103"/>
             <a:ext cx="914400" cy="914400"/>
           </a:xfrm>
           <a:prstGeom prst="rect">
@@ -8439,13 +8488,13 @@
           <p:nvPr/>
         </p:nvPicPr>
         <p:blipFill>
-          <a:blip r:embed="rId4">
+          <a:blip>
             <a:extLst>
               <a:ext uri="{28A0092B-C50C-407E-A947-70E740481C1C}">
                 <a14:useLocalDpi xmlns:a14="http://schemas.microsoft.com/office/drawing/2010/main" val="0"/>
               </a:ext>
               <a:ext uri="{96DAC541-7B7A-43D3-8B79-37D633B846F1}">
-                <asvg:svgBlip xmlns:asvg="http://schemas.microsoft.com/office/drawing/2016/SVG/main" r:embed="rId5"/>
+                <asvg:svgBlip xmlns:asvg="http://schemas.microsoft.com/office/drawing/2016/SVG/main" r:embed="rId3"/>
               </a:ext>
             </a:extLst>
           </a:blip>
@@ -8455,7 +8504,7 @@
         </p:blipFill>
         <p:spPr>
           <a:xfrm>
-            <a:off x="6638365" y="2440642"/>
+            <a:off x="6826623" y="2445543"/>
             <a:ext cx="914400" cy="914400"/>
           </a:xfrm>
           <a:prstGeom prst="rect">
@@ -8478,13 +8527,13 @@
           <p:nvPr/>
         </p:nvPicPr>
         <p:blipFill>
-          <a:blip r:embed="rId6">
+          <a:blip>
             <a:extLst>
               <a:ext uri="{28A0092B-C50C-407E-A947-70E740481C1C}">
                 <a14:useLocalDpi xmlns:a14="http://schemas.microsoft.com/office/drawing/2010/main" val="0"/>
               </a:ext>
               <a:ext uri="{96DAC541-7B7A-43D3-8B79-37D633B846F1}">
-                <asvg:svgBlip xmlns:asvg="http://schemas.microsoft.com/office/drawing/2016/SVG/main" r:embed="rId7"/>
+                <asvg:svgBlip xmlns:asvg="http://schemas.microsoft.com/office/drawing/2016/SVG/main" r:embed="rId4"/>
               </a:ext>
             </a:extLst>
           </a:blip>
@@ -8494,8 +8543,8 @@
         </p:blipFill>
         <p:spPr>
           <a:xfrm>
-            <a:off x="2900083" y="4672853"/>
-            <a:ext cx="914400" cy="914400"/>
+            <a:off x="3044248" y="4770052"/>
+            <a:ext cx="720000" cy="720000"/>
           </a:xfrm>
           <a:prstGeom prst="rect">
             <a:avLst/>
@@ -8517,13 +8566,13 @@
           <p:nvPr/>
         </p:nvPicPr>
         <p:blipFill>
-          <a:blip r:embed="rId8">
+          <a:blip>
             <a:extLst>
               <a:ext uri="{28A0092B-C50C-407E-A947-70E740481C1C}">
                 <a14:useLocalDpi xmlns:a14="http://schemas.microsoft.com/office/drawing/2010/main" val="0"/>
               </a:ext>
               <a:ext uri="{96DAC541-7B7A-43D3-8B79-37D633B846F1}">
-                <asvg:svgBlip xmlns:asvg="http://schemas.microsoft.com/office/drawing/2016/SVG/main" r:embed="rId9"/>
+                <asvg:svgBlip xmlns:asvg="http://schemas.microsoft.com/office/drawing/2016/SVG/main" r:embed="rId5"/>
               </a:ext>
             </a:extLst>
           </a:blip>
@@ -8541,6 +8590,182 @@
           </a:prstGeom>
         </p:spPr>
       </p:pic>
+      <p:sp>
+        <p:nvSpPr>
+          <p:cNvPr id="3" name="TextBox 2">
+            <a:extLst>
+              <a:ext uri="{FF2B5EF4-FFF2-40B4-BE49-F238E27FC236}">
+                <a16:creationId xmlns:a16="http://schemas.microsoft.com/office/drawing/2014/main" id="{67EA0133-F7CD-68B7-3231-1974C0E73FC3}"/>
+              </a:ext>
+            </a:extLst>
+          </p:cNvPr>
+          <p:cNvSpPr txBox="1"/>
+          <p:nvPr/>
+        </p:nvSpPr>
+        <p:spPr>
+          <a:xfrm>
+            <a:off x="4092388" y="2588781"/>
+            <a:ext cx="1065292" cy="461665"/>
+          </a:xfrm>
+          <a:prstGeom prst="rect">
+            <a:avLst/>
+          </a:prstGeom>
+          <a:noFill/>
+        </p:spPr>
+        <p:txBody>
+          <a:bodyPr wrap="none" rtlCol="0">
+            <a:spAutoFit/>
+          </a:bodyPr>
+          <a:lstStyle/>
+          <a:p>
+            <a:r>
+              <a:rPr lang="id-ID" sz="2400" b="1" dirty="0">
+                <a:solidFill>
+                  <a:schemeClr val="bg1"/>
+                </a:solidFill>
+              </a:rPr>
+              <a:t>Laptop</a:t>
+            </a:r>
+            <a:endParaRPr lang="id-ID" sz="2400" dirty="0">
+              <a:solidFill>
+                <a:schemeClr val="bg1"/>
+              </a:solidFill>
+            </a:endParaRPr>
+          </a:p>
+        </p:txBody>
+      </p:sp>
+      <p:sp>
+        <p:nvSpPr>
+          <p:cNvPr id="4" name="TextBox 3">
+            <a:extLst>
+              <a:ext uri="{FF2B5EF4-FFF2-40B4-BE49-F238E27FC236}">
+                <a16:creationId xmlns:a16="http://schemas.microsoft.com/office/drawing/2014/main" id="{365168F3-4E34-C620-5E5D-C5F0A92831FF}"/>
+              </a:ext>
+            </a:extLst>
+          </p:cNvPr>
+          <p:cNvSpPr txBox="1"/>
+          <p:nvPr/>
+        </p:nvSpPr>
+        <p:spPr>
+          <a:xfrm>
+            <a:off x="7741023" y="2626667"/>
+            <a:ext cx="1765227" cy="461665"/>
+          </a:xfrm>
+          <a:prstGeom prst="rect">
+            <a:avLst/>
+          </a:prstGeom>
+          <a:noFill/>
+        </p:spPr>
+        <p:txBody>
+          <a:bodyPr wrap="none" rtlCol="0">
+            <a:spAutoFit/>
+          </a:bodyPr>
+          <a:lstStyle/>
+          <a:p>
+            <a:r>
+              <a:rPr lang="id-ID" sz="2400" b="1" dirty="0">
+                <a:solidFill>
+                  <a:schemeClr val="bg1"/>
+                </a:solidFill>
+              </a:rPr>
+              <a:t>Smartphone</a:t>
+            </a:r>
+            <a:endParaRPr lang="id-ID" sz="2400" dirty="0">
+              <a:solidFill>
+                <a:schemeClr val="bg1"/>
+              </a:solidFill>
+            </a:endParaRPr>
+          </a:p>
+        </p:txBody>
+      </p:sp>
+      <p:sp>
+        <p:nvSpPr>
+          <p:cNvPr id="9" name="TextBox 8">
+            <a:extLst>
+              <a:ext uri="{FF2B5EF4-FFF2-40B4-BE49-F238E27FC236}">
+                <a16:creationId xmlns:a16="http://schemas.microsoft.com/office/drawing/2014/main" id="{8E2B9EE0-86FA-A7EE-7287-3505F62BDC03}"/>
+              </a:ext>
+            </a:extLst>
+          </p:cNvPr>
+          <p:cNvSpPr txBox="1"/>
+          <p:nvPr/>
+        </p:nvSpPr>
+        <p:spPr>
+          <a:xfrm>
+            <a:off x="3662897" y="4899220"/>
+            <a:ext cx="2288191" cy="461665"/>
+          </a:xfrm>
+          <a:prstGeom prst="rect">
+            <a:avLst/>
+          </a:prstGeom>
+          <a:noFill/>
+        </p:spPr>
+        <p:txBody>
+          <a:bodyPr wrap="none" rtlCol="0">
+            <a:spAutoFit/>
+          </a:bodyPr>
+          <a:lstStyle/>
+          <a:p>
+            <a:r>
+              <a:rPr lang="id-ID" sz="2400" b="1" dirty="0">
+                <a:solidFill>
+                  <a:schemeClr val="bg1"/>
+                </a:solidFill>
+              </a:rPr>
+              <a:t>Servis Komputer</a:t>
+            </a:r>
+          </a:p>
+        </p:txBody>
+      </p:sp>
+      <p:sp>
+        <p:nvSpPr>
+          <p:cNvPr id="11" name="TextBox 10">
+            <a:extLst>
+              <a:ext uri="{FF2B5EF4-FFF2-40B4-BE49-F238E27FC236}">
+                <a16:creationId xmlns:a16="http://schemas.microsoft.com/office/drawing/2014/main" id="{85CFC67D-9DBA-B3A6-3C96-898D96D47F72}"/>
+              </a:ext>
+            </a:extLst>
+          </p:cNvPr>
+          <p:cNvSpPr txBox="1"/>
+          <p:nvPr/>
+        </p:nvSpPr>
+        <p:spPr>
+          <a:xfrm>
+            <a:off x="7892859" y="4714553"/>
+            <a:ext cx="1461554" cy="830997"/>
+          </a:xfrm>
+          <a:prstGeom prst="rect">
+            <a:avLst/>
+          </a:prstGeom>
+          <a:noFill/>
+        </p:spPr>
+        <p:txBody>
+          <a:bodyPr wrap="none" rtlCol="0">
+            <a:spAutoFit/>
+          </a:bodyPr>
+          <a:lstStyle/>
+          <a:p>
+            <a:r>
+              <a:rPr lang="id-ID" sz="2400" b="1" dirty="0">
+                <a:solidFill>
+                  <a:schemeClr val="bg1"/>
+                </a:solidFill>
+              </a:rPr>
+              <a:t>Pelatihan</a:t>
+            </a:r>
+          </a:p>
+          <a:p>
+            <a:r>
+              <a:rPr lang="id-ID" sz="2400" b="1" dirty="0">
+                <a:solidFill>
+                  <a:schemeClr val="bg1"/>
+                </a:solidFill>
+              </a:rPr>
+              <a:t>Komputer</a:t>
+            </a:r>
+          </a:p>
+        </p:txBody>
+      </p:sp>
     </p:spTree>
     <p:extLst>
       <p:ext uri="{BB962C8B-B14F-4D97-AF65-F5344CB8AC3E}">
@@ -8618,8 +8843,8 @@
         </p:nvSpPr>
         <p:spPr>
           <a:xfrm>
-            <a:off x="1195754" y="1885071"/>
-            <a:ext cx="10016197" cy="646331"/>
+            <a:off x="838200" y="1885071"/>
+            <a:ext cx="10515600" cy="646331"/>
           </a:xfrm>
           <a:prstGeom prst="rect">
             <a:avLst/>
@@ -8634,10 +8859,9 @@
           <a:p>
             <a:pPr algn="ctr"/>
             <a:r>
-              <a:rPr lang="id-ID" i="1"/>
+              <a:rPr lang="id-ID" i="1" dirty="0"/>
               <a:t>"Semoga presentasi ini memberikan gambaran yang bermanfaat. Saya siap menerima pertanyaan dan masukan."</a:t>
             </a:r>
-            <a:endParaRPr lang="id-ID" i="1" dirty="0"/>
           </a:p>
         </p:txBody>
       </p:sp>
@@ -8656,13 +8880,13 @@
           <p:nvPr/>
         </p:nvPicPr>
         <p:blipFill>
-          <a:blip r:embed="rId2">
+          <a:blip>
             <a:extLst>
               <a:ext uri="{28A0092B-C50C-407E-A947-70E740481C1C}">
                 <a14:useLocalDpi xmlns:a14="http://schemas.microsoft.com/office/drawing/2010/main" val="0"/>
               </a:ext>
               <a:ext uri="{96DAC541-7B7A-43D3-8B79-37D633B846F1}">
-                <asvg:svgBlip xmlns:asvg="http://schemas.microsoft.com/office/drawing/2016/SVG/main" r:embed="rId3"/>
+                <asvg:svgBlip xmlns:asvg="http://schemas.microsoft.com/office/drawing/2016/SVG/main" r:embed="rId2"/>
               </a:ext>
             </a:extLst>
           </a:blip>
@@ -8672,8 +8896,8 @@
         </p:blipFill>
         <p:spPr>
           <a:xfrm>
-            <a:off x="1390357" y="2971800"/>
-            <a:ext cx="914400" cy="914400"/>
+            <a:off x="4452211" y="3065839"/>
+            <a:ext cx="720000" cy="720000"/>
           </a:xfrm>
           <a:prstGeom prst="rect">
             <a:avLst/>
@@ -8694,7 +8918,7 @@
         </p:nvSpPr>
         <p:spPr>
           <a:xfrm>
-            <a:off x="2686929" y="3244334"/>
+            <a:off x="5374848" y="3241173"/>
             <a:ext cx="1867819" cy="369332"/>
           </a:xfrm>
           <a:prstGeom prst="rect">
@@ -8730,13 +8954,13 @@
           <p:nvPr/>
         </p:nvPicPr>
         <p:blipFill>
-          <a:blip r:embed="rId4">
+          <a:blip>
             <a:extLst>
               <a:ext uri="{28A0092B-C50C-407E-A947-70E740481C1C}">
                 <a14:useLocalDpi xmlns:a14="http://schemas.microsoft.com/office/drawing/2010/main" val="0"/>
               </a:ext>
               <a:ext uri="{96DAC541-7B7A-43D3-8B79-37D633B846F1}">
-                <asvg:svgBlip xmlns:asvg="http://schemas.microsoft.com/office/drawing/2016/SVG/main" r:embed="rId5"/>
+                <asvg:svgBlip xmlns:asvg="http://schemas.microsoft.com/office/drawing/2016/SVG/main" r:embed="rId3"/>
               </a:ext>
             </a:extLst>
           </a:blip>
@@ -8746,8 +8970,8 @@
         </p:blipFill>
         <p:spPr>
           <a:xfrm>
-            <a:off x="1390357" y="3886200"/>
-            <a:ext cx="914400" cy="914400"/>
+            <a:off x="4452211" y="3933997"/>
+            <a:ext cx="720000" cy="720000"/>
           </a:xfrm>
           <a:prstGeom prst="rect">
             <a:avLst/>
@@ -8768,7 +8992,7 @@
         </p:nvSpPr>
         <p:spPr>
           <a:xfrm>
-            <a:off x="2686929" y="4158734"/>
+            <a:off x="5374848" y="4109331"/>
             <a:ext cx="1729961" cy="369332"/>
           </a:xfrm>
           <a:prstGeom prst="rect">
@@ -8804,13 +9028,13 @@
           <p:nvPr/>
         </p:nvPicPr>
         <p:blipFill>
-          <a:blip r:embed="rId6">
+          <a:blip>
             <a:extLst>
               <a:ext uri="{28A0092B-C50C-407E-A947-70E740481C1C}">
                 <a14:useLocalDpi xmlns:a14="http://schemas.microsoft.com/office/drawing/2010/main" val="0"/>
               </a:ext>
               <a:ext uri="{96DAC541-7B7A-43D3-8B79-37D633B846F1}">
-                <asvg:svgBlip xmlns:asvg="http://schemas.microsoft.com/office/drawing/2016/SVG/main" r:embed="rId7"/>
+                <asvg:svgBlip xmlns:asvg="http://schemas.microsoft.com/office/drawing/2016/SVG/main" r:embed="rId4"/>
               </a:ext>
             </a:extLst>
           </a:blip>
@@ -8820,8 +9044,8 @@
         </p:blipFill>
         <p:spPr>
           <a:xfrm>
-            <a:off x="1390357" y="4985211"/>
-            <a:ext cx="914400" cy="914400"/>
+            <a:off x="4452211" y="4802156"/>
+            <a:ext cx="720000" cy="720000"/>
           </a:xfrm>
           <a:prstGeom prst="rect">
             <a:avLst/>
@@ -8842,7 +9066,7 @@
         </p:nvSpPr>
         <p:spPr>
           <a:xfrm>
-            <a:off x="2686929" y="5073134"/>
+            <a:off x="5374848" y="4977489"/>
             <a:ext cx="1840247" cy="369332"/>
           </a:xfrm>
           <a:prstGeom prst="rect">
@@ -8887,140 +9111,46 @@
         <a:sysClr val="window" lastClr="FFFFFF"/>
       </a:lt1>
       <a:dk2>
-        <a:srgbClr val="44546A"/>
+        <a:srgbClr val="0E2841"/>
       </a:dk2>
       <a:lt2>
-        <a:srgbClr val="E7E6E6"/>
+        <a:srgbClr val="E8E8E8"/>
       </a:lt2>
       <a:accent1>
-        <a:srgbClr val="4472C4"/>
+        <a:srgbClr val="156082"/>
       </a:accent1>
       <a:accent2>
-        <a:srgbClr val="ED7D31"/>
+        <a:srgbClr val="E97132"/>
       </a:accent2>
       <a:accent3>
-        <a:srgbClr val="A5A5A5"/>
+        <a:srgbClr val="196B24"/>
       </a:accent3>
       <a:accent4>
-        <a:srgbClr val="FFC000"/>
+        <a:srgbClr val="0F9ED5"/>
       </a:accent4>
       <a:accent5>
-        <a:srgbClr val="5B9BD5"/>
+        <a:srgbClr val="A02B93"/>
       </a:accent5>
       <a:accent6>
-        <a:srgbClr val="70AD47"/>
+        <a:srgbClr val="4EA72E"/>
       </a:accent6>
       <a:hlink>
-        <a:srgbClr val="0563C1"/>
+        <a:srgbClr val="467886"/>
       </a:hlink>
       <a:folHlink>
-        <a:srgbClr val="954F72"/>
+        <a:srgbClr val="96607D"/>
       </a:folHlink>
     </a:clrScheme>
-    <a:fontScheme name="Office">
+    <a:fontScheme name="Font Profil Perusahaan">
       <a:majorFont>
-        <a:latin typeface="Calibri Light" panose="020F0302020204030204"/>
+        <a:latin typeface="Aptos"/>
         <a:ea typeface=""/>
         <a:cs typeface=""/>
-        <a:font script="Jpan" typeface="游ゴシック Light"/>
-        <a:font script="Hang" typeface="맑은 고딕"/>
-        <a:font script="Hans" typeface="等线 Light"/>
-        <a:font script="Hant" typeface="新細明體"/>
-        <a:font script="Arab" typeface="Times New Roman"/>
-        <a:font script="Hebr" typeface="Times New Roman"/>
-        <a:font script="Thai" typeface="Angsana New"/>
-        <a:font script="Ethi" typeface="Nyala"/>
-        <a:font script="Beng" typeface="Vrinda"/>
-        <a:font script="Gujr" typeface="Shruti"/>
-        <a:font script="Khmr" typeface="MoolBoran"/>
-        <a:font script="Knda" typeface="Tunga"/>
-        <a:font script="Guru" typeface="Raavi"/>
-        <a:font script="Cans" typeface="Euphemia"/>
-        <a:font script="Cher" typeface="Plantagenet Cherokee"/>
-        <a:font script="Yiii" typeface="Microsoft Yi Baiti"/>
-        <a:font script="Tibt" typeface="Microsoft Himalaya"/>
-        <a:font script="Thaa" typeface="MV Boli"/>
-        <a:font script="Deva" typeface="Mangal"/>
-        <a:font script="Telu" typeface="Gautami"/>
-        <a:font script="Taml" typeface="Latha"/>
-        <a:font script="Syrc" typeface="Estrangelo Edessa"/>
-        <a:font script="Orya" typeface="Kalinga"/>
-        <a:font script="Mlym" typeface="Kartika"/>
-        <a:font script="Laoo" typeface="DokChampa"/>
-        <a:font script="Sinh" typeface="Iskoola Pota"/>
-        <a:font script="Mong" typeface="Mongolian Baiti"/>
-        <a:font script="Viet" typeface="Times New Roman"/>
-        <a:font script="Uigh" typeface="Microsoft Uighur"/>
-        <a:font script="Geor" typeface="Sylfaen"/>
-        <a:font script="Armn" typeface="Arial"/>
-        <a:font script="Bugi" typeface="Leelawadee UI"/>
-        <a:font script="Bopo" typeface="Microsoft JhengHei"/>
-        <a:font script="Java" typeface="Javanese Text"/>
-        <a:font script="Lisu" typeface="Segoe UI"/>
-        <a:font script="Mymr" typeface="Myanmar Text"/>
-        <a:font script="Nkoo" typeface="Ebrima"/>
-        <a:font script="Olck" typeface="Nirmala UI"/>
-        <a:font script="Osma" typeface="Ebrima"/>
-        <a:font script="Phag" typeface="Phagspa"/>
-        <a:font script="Syrn" typeface="Estrangelo Edessa"/>
-        <a:font script="Syrj" typeface="Estrangelo Edessa"/>
-        <a:font script="Syre" typeface="Estrangelo Edessa"/>
-        <a:font script="Sora" typeface="Nirmala UI"/>
-        <a:font script="Tale" typeface="Microsoft Tai Le"/>
-        <a:font script="Talu" typeface="Microsoft New Tai Lue"/>
-        <a:font script="Tfng" typeface="Ebrima"/>
       </a:majorFont>
       <a:minorFont>
-        <a:latin typeface="Calibri" panose="020F0502020204030204"/>
+        <a:latin typeface="Calibri"/>
         <a:ea typeface=""/>
         <a:cs typeface=""/>
-        <a:font script="Jpan" typeface="游ゴシック"/>
-        <a:font script="Hang" typeface="맑은 고딕"/>
-        <a:font script="Hans" typeface="等线"/>
-        <a:font script="Hant" typeface="新細明體"/>
-        <a:font script="Arab" typeface="Arial"/>
-        <a:font script="Hebr" typeface="Arial"/>
-        <a:font script="Thai" typeface="Cordia New"/>
-        <a:font script="Ethi" typeface="Nyala"/>
-        <a:font script="Beng" typeface="Vrinda"/>
-        <a:font script="Gujr" typeface="Shruti"/>
-        <a:font script="Khmr" typeface="DaunPenh"/>
-        <a:font script="Knda" typeface="Tunga"/>
-        <a:font script="Guru" typeface="Raavi"/>
-        <a:font script="Cans" typeface="Euphemia"/>
-        <a:font script="Cher" typeface="Plantagenet Cherokee"/>
-        <a:font script="Yiii" typeface="Microsoft Yi Baiti"/>
-        <a:font script="Tibt" typeface="Microsoft Himalaya"/>
-        <a:font script="Thaa" typeface="MV Boli"/>
-        <a:font script="Deva" typeface="Mangal"/>
-        <a:font script="Telu" typeface="Gautami"/>
-        <a:font script="Taml" typeface="Latha"/>
-        <a:font script="Syrc" typeface="Estrangelo Edessa"/>
-        <a:font script="Orya" typeface="Kalinga"/>
-        <a:font script="Mlym" typeface="Kartika"/>
-        <a:font script="Laoo" typeface="DokChampa"/>
-        <a:font script="Sinh" typeface="Iskoola Pota"/>
-        <a:font script="Mong" typeface="Mongolian Baiti"/>
-        <a:font script="Viet" typeface="Arial"/>
-        <a:font script="Uigh" typeface="Microsoft Uighur"/>
-        <a:font script="Geor" typeface="Sylfaen"/>
-        <a:font script="Armn" typeface="Arial"/>
-        <a:font script="Bugi" typeface="Leelawadee UI"/>
-        <a:font script="Bopo" typeface="Microsoft JhengHei"/>
-        <a:font script="Java" typeface="Javanese Text"/>
-        <a:font script="Lisu" typeface="Segoe UI"/>
-        <a:font script="Mymr" typeface="Myanmar Text"/>
-        <a:font script="Nkoo" typeface="Ebrima"/>
-        <a:font script="Olck" typeface="Nirmala UI"/>
-        <a:font script="Osma" typeface="Ebrima"/>
-        <a:font script="Phag" typeface="Phagspa"/>
-        <a:font script="Syrn" typeface="Estrangelo Edessa"/>
-        <a:font script="Syrj" typeface="Estrangelo Edessa"/>
-        <a:font script="Syre" typeface="Estrangelo Edessa"/>
-        <a:font script="Sora" typeface="Nirmala UI"/>
-        <a:font script="Tale" typeface="Microsoft Tai Le"/>
-        <a:font script="Talu" typeface="Microsoft New Tai Lue"/>
-        <a:font script="Tfng" typeface="Ebrima"/>
       </a:minorFont>
     </a:fontScheme>
     <a:fmtScheme name="Office">
@@ -9082,13 +9212,6 @@
         </a:gradFill>
       </a:fillStyleLst>
       <a:lnStyleLst>
-        <a:ln w="6350" cap="flat" cmpd="sng" algn="ctr">
-          <a:solidFill>
-            <a:schemeClr val="phClr"/>
-          </a:solidFill>
-          <a:prstDash val="solid"/>
-          <a:miter lim="800000"/>
-        </a:ln>
         <a:ln w="12700" cap="flat" cmpd="sng" algn="ctr">
           <a:solidFill>
             <a:schemeClr val="phClr"/>
@@ -9097,6 +9220,13 @@
           <a:miter lim="800000"/>
         </a:ln>
         <a:ln w="19050" cap="flat" cmpd="sng" algn="ctr">
+          <a:solidFill>
+            <a:schemeClr val="phClr"/>
+          </a:solidFill>
+          <a:prstDash val="solid"/>
+          <a:miter lim="800000"/>
+        </a:ln>
+        <a:ln w="25400" cap="flat" cmpd="sng" algn="ctr">
           <a:solidFill>
             <a:schemeClr val="phClr"/>
           </a:solidFill>
@@ -9161,11 +9291,31 @@
       </a:bgFillStyleLst>
     </a:fmtScheme>
   </a:themeElements>
-  <a:objectDefaults/>
+  <a:objectDefaults>
+    <a:lnDef>
+      <a:spPr/>
+      <a:bodyPr/>
+      <a:lstStyle/>
+      <a:style>
+        <a:lnRef idx="2">
+          <a:schemeClr val="accent1"/>
+        </a:lnRef>
+        <a:fillRef idx="0">
+          <a:schemeClr val="accent1"/>
+        </a:fillRef>
+        <a:effectRef idx="1">
+          <a:schemeClr val="accent1"/>
+        </a:effectRef>
+        <a:fontRef idx="minor">
+          <a:schemeClr val="tx1"/>
+        </a:fontRef>
+      </a:style>
+    </a:lnDef>
+  </a:objectDefaults>
   <a:extraClrSchemeLst/>
   <a:extLst>
     <a:ext uri="{05A4C25C-085E-4340-85A3-A5531E510DB2}">
-      <thm15:themeFamily xmlns:thm15="http://schemas.microsoft.com/office/thememl/2012/main" name="Office Theme" id="{62F939B6-93AF-4DB8-9C6B-D6C7DFDC589F}" vid="{4A3C46E8-61CC-4603-A589-7422A47A8E4A}"/>
+      <thm15:themeFamily xmlns:thm15="http://schemas.microsoft.com/office/thememl/2012/main" name="Office Theme" id="{2E142A2C-CD16-42D6-873A-C26D2A0506FA}" vid="{1BDDFF52-6CD6-40A5-AB3C-68EB2F1E4D0A}"/>
     </a:ext>
   </a:extLst>
 </a:theme>
